--- a/content/W01/D1/slides/C2_W01_D01_half1_STUDENT.pptx
+++ b/content/W01/D1/slides/C2_W01_D01_half1_STUDENT.pptx
@@ -3236,7 +3236,7 @@
           <a:noFill/>
         </p:spPr>
         <p:txBody>
-          <a:bodyPr wrap="square" anchor="ctr">
+          <a:bodyPr wrap="square" anchor="ctr" lIns="0" rIns="0" tIns="0" bIns="0">
             <a:spAutoFit/>
           </a:bodyPr>
           <a:lstStyle/>
@@ -3305,8 +3305,8 @@
         </p:nvSpPr>
         <p:spPr>
           <a:xfrm>
-            <a:off x="685800" y="3157728"/>
-            <a:ext cx="10820095" cy="1365504"/>
+            <a:off x="685800" y="2985008"/>
+            <a:ext cx="10820095" cy="1710944"/>
           </a:xfrm>
           <a:prstGeom prst="rect">
             <a:avLst/>
@@ -3314,7 +3314,7 @@
           <a:noFill/>
         </p:spPr>
         <p:txBody>
-          <a:bodyPr wrap="square" anchor="t">
+          <a:bodyPr wrap="square" anchor="t" lIns="0" rIns="0" tIns="0" bIns="0">
             <a:spAutoFit/>
           </a:bodyPr>
           <a:lstStyle/>
@@ -3413,7 +3413,7 @@
           <a:noFill/>
         </p:spPr>
         <p:txBody>
-          <a:bodyPr wrap="square" anchor="t">
+          <a:bodyPr wrap="square" anchor="t" lIns="0" rIns="0" tIns="0" bIns="0">
             <a:spAutoFit/>
           </a:bodyPr>
           <a:lstStyle/>
@@ -3447,7 +3447,7 @@
           <a:noFill/>
         </p:spPr>
         <p:txBody>
-          <a:bodyPr wrap="square" anchor="t">
+          <a:bodyPr wrap="square" anchor="t" lIns="0" rIns="0" tIns="0" bIns="0">
             <a:spAutoFit/>
           </a:bodyPr>
           <a:lstStyle/>
@@ -3544,7 +3544,7 @@
           <a:noFill/>
         </p:spPr>
         <p:txBody>
-          <a:bodyPr wrap="square" anchor="ctr">
+          <a:bodyPr wrap="square" anchor="ctr" lIns="0" rIns="0" tIns="0" bIns="0">
             <a:spAutoFit/>
           </a:bodyPr>
           <a:lstStyle/>
@@ -3888,7 +3888,7 @@
           <a:noFill/>
         </p:spPr>
         <p:txBody>
-          <a:bodyPr wrap="square" anchor="t">
+          <a:bodyPr wrap="square" anchor="t" lIns="0" rIns="0" tIns="0" bIns="0">
             <a:spAutoFit/>
           </a:bodyPr>
           <a:lstStyle/>
@@ -3922,7 +3922,7 @@
           <a:noFill/>
         </p:spPr>
         <p:txBody>
-          <a:bodyPr wrap="square" anchor="t">
+          <a:bodyPr wrap="square" anchor="t" lIns="0" rIns="0" tIns="0" bIns="0">
             <a:spAutoFit/>
           </a:bodyPr>
           <a:lstStyle/>
@@ -4072,7 +4072,7 @@
           <a:noFill/>
         </p:spPr>
         <p:txBody>
-          <a:bodyPr wrap="square" anchor="ctr">
+          <a:bodyPr wrap="square" anchor="ctr" lIns="0" rIns="0" tIns="0" bIns="0">
             <a:spAutoFit/>
           </a:bodyPr>
           <a:lstStyle/>
@@ -4133,9 +4133,80 @@
           </a:p>
         </p:txBody>
       </p:sp>
+      <p:sp>
+        <p:nvSpPr>
+          <p:cNvPr id="6" name="TextBox 5"/>
+          <p:cNvSpPr txBox="1"/>
+          <p:nvPr/>
+        </p:nvSpPr>
+        <p:spPr>
+          <a:xfrm>
+            <a:off x="685800" y="1627632"/>
+            <a:ext cx="10820095" cy="1613408"/>
+          </a:xfrm>
+          <a:prstGeom prst="rect">
+            <a:avLst/>
+          </a:prstGeom>
+          <a:noFill/>
+        </p:spPr>
+        <p:txBody>
+          <a:bodyPr wrap="square" anchor="t" lIns="0" rIns="0" tIns="0" bIns="0">
+            <a:spAutoFit/>
+          </a:bodyPr>
+          <a:lstStyle/>
+          <a:p>
+            <a:pPr>
+              <a:spcAft>
+                <a:spcPts val="800"/>
+              </a:spcAft>
+            </a:pPr>
+            <a:r>
+              <a:rPr sz="1700" b="0">
+                <a:solidFill>
+                  <a:srgbClr val="1C1C1A"/>
+                </a:solidFill>
+                <a:latin typeface="Calibri"/>
+              </a:rPr>
+              <a:t>The kernel is a workbench that keeps whatever you put on it for as long as it is running.</a:t>
+            </a:r>
+          </a:p>
+          <a:p>
+            <a:pPr>
+              <a:spcAft>
+                <a:spcPts val="800"/>
+              </a:spcAft>
+            </a:pPr>
+            <a:r>
+              <a:rPr sz="1700" b="0">
+                <a:solidFill>
+                  <a:srgbClr val="1C1C1A"/>
+                </a:solidFill>
+                <a:latin typeface="Calibri"/>
+              </a:rPr>
+              <a:t>Running a cell is you putting something on the bench. Restarting the kernel sweeps the bench clean, and the file on disk is untouched by that.</a:t>
+            </a:r>
+          </a:p>
+          <a:p>
+            <a:pPr>
+              <a:spcAft>
+                <a:spcPts val="800"/>
+              </a:spcAft>
+            </a:pPr>
+            <a:r>
+              <a:rPr sz="1700" b="0">
+                <a:solidFill>
+                  <a:srgbClr val="1C1C1A"/>
+                </a:solidFill>
+                <a:latin typeface="Calibri"/>
+              </a:rPr>
+              <a:t>This picture is the one we use for the rest of the day.</a:t>
+            </a:r>
+          </a:p>
+        </p:txBody>
+      </p:sp>
       <p:pic>
         <p:nvPicPr>
-          <p:cNvPr id="6" name="Picture 5" descr="b4a1665df5aeef43.png"/>
+          <p:cNvPr id="7" name="Picture 6" descr="7479995596a4da23.png"/>
           <p:cNvPicPr>
             <a:picLocks noChangeAspect="1"/>
           </p:cNvPicPr>
@@ -4149,7 +4220,7 @@
         </p:blipFill>
         <p:spPr>
           <a:xfrm>
-            <a:off x="685800" y="2563450"/>
+            <a:off x="685800" y="4415618"/>
             <a:ext cx="10820095" cy="897979"/>
           </a:xfrm>
           <a:prstGeom prst="rect">
@@ -4157,40 +4228,6 @@
           </a:prstGeom>
         </p:spPr>
       </p:pic>
-      <p:sp>
-        <p:nvSpPr>
-          <p:cNvPr id="7" name="TextBox 6"/>
-          <p:cNvSpPr txBox="1"/>
-          <p:nvPr/>
-        </p:nvSpPr>
-        <p:spPr>
-          <a:xfrm>
-            <a:off x="685800" y="4506976"/>
-            <a:ext cx="10820095" cy="1546352"/>
-          </a:xfrm>
-          <a:prstGeom prst="rect">
-            <a:avLst/>
-          </a:prstGeom>
-          <a:noFill/>
-        </p:spPr>
-        <p:txBody>
-          <a:bodyPr wrap="square" anchor="t">
-            <a:spAutoFit/>
-          </a:bodyPr>
-          <a:lstStyle/>
-          <a:p>
-            <a:r>
-              <a:rPr sz="2000" b="0">
-                <a:solidFill>
-                  <a:srgbClr val="1C1C1A"/>
-                </a:solidFill>
-                <a:latin typeface="Calibri"/>
-              </a:rPr>
-              <a:t>The kernel is a workbench that keeps whatever you put on it for as long as it is running. Running a cell is you putting something on the bench. Restarting the kernel sweeps the bench clean, and the file on disk is untouched by that. This picture is the one we use for the rest of the day.</a:t>
-            </a:r>
-          </a:p>
-        </p:txBody>
-      </p:sp>
       <p:sp>
         <p:nvSpPr>
           <p:cNvPr id="8" name="Rectangle 7"/>
@@ -4252,7 +4289,7 @@
           <a:noFill/>
         </p:spPr>
         <p:txBody>
-          <a:bodyPr wrap="square" anchor="t">
+          <a:bodyPr wrap="square" anchor="t" lIns="0" rIns="0" tIns="0" bIns="0">
             <a:spAutoFit/>
           </a:bodyPr>
           <a:lstStyle/>
@@ -4286,7 +4323,7 @@
           <a:noFill/>
         </p:spPr>
         <p:txBody>
-          <a:bodyPr wrap="square" anchor="t">
+          <a:bodyPr wrap="square" anchor="t" lIns="0" rIns="0" tIns="0" bIns="0">
             <a:spAutoFit/>
           </a:bodyPr>
           <a:lstStyle/>
@@ -4436,7 +4473,7 @@
           <a:noFill/>
         </p:spPr>
         <p:txBody>
-          <a:bodyPr wrap="square" anchor="ctr">
+          <a:bodyPr wrap="square" anchor="ctr" lIns="0" rIns="0" tIns="0" bIns="0">
             <a:spAutoFit/>
           </a:bodyPr>
           <a:lstStyle/>
@@ -4497,9 +4534,64 @@
           </a:p>
         </p:txBody>
       </p:sp>
+      <p:sp>
+        <p:nvSpPr>
+          <p:cNvPr id="6" name="TextBox 5"/>
+          <p:cNvSpPr txBox="1"/>
+          <p:nvPr/>
+        </p:nvSpPr>
+        <p:spPr>
+          <a:xfrm>
+            <a:off x="685800" y="1627632"/>
+            <a:ext cx="10820095" cy="1710944"/>
+          </a:xfrm>
+          <a:prstGeom prst="rect">
+            <a:avLst/>
+          </a:prstGeom>
+          <a:noFill/>
+        </p:spPr>
+        <p:txBody>
+          <a:bodyPr wrap="square" anchor="t" lIns="0" rIns="0" tIns="0" bIns="0">
+            <a:spAutoFit/>
+          </a:bodyPr>
+          <a:lstStyle/>
+          <a:p>
+            <a:pPr>
+              <a:spcAft>
+                <a:spcPts val="900"/>
+              </a:spcAft>
+            </a:pPr>
+            <a:r>
+              <a:rPr sz="2000" b="0">
+                <a:solidFill>
+                  <a:srgbClr val="1C1C1A"/>
+                </a:solidFill>
+                <a:latin typeface="Calibri"/>
+              </a:rPr>
+              <a:t>The notebook is a stack of cells on a screen, and the kernel has no opinion at all about that stack.</a:t>
+            </a:r>
+          </a:p>
+          <a:p>
+            <a:pPr>
+              <a:spcAft>
+                <a:spcPts val="900"/>
+              </a:spcAft>
+            </a:pPr>
+            <a:r>
+              <a:rPr sz="2000" b="0">
+                <a:solidFill>
+                  <a:srgbClr val="1C1C1A"/>
+                </a:solidFill>
+                <a:latin typeface="Calibri"/>
+              </a:rPr>
+              <a:t>The kernel sees the order you clicked run in. If you ran the third cell first, then the third cell ran first.</a:t>
+            </a:r>
+          </a:p>
+        </p:txBody>
+      </p:sp>
       <p:pic>
         <p:nvPicPr>
-          <p:cNvPr id="6" name="Picture 5" descr="9e8ec3ef346a41fe.png"/>
+          <p:cNvPr id="7" name="Picture 6" descr="2e48a53b63f84a37.png"/>
           <p:cNvPicPr>
             <a:picLocks noChangeAspect="1"/>
           </p:cNvPicPr>
@@ -4513,48 +4605,14 @@
         </p:blipFill>
         <p:spPr>
           <a:xfrm>
-            <a:off x="1073006" y="1627632"/>
-            <a:ext cx="10045682" cy="3115055"/>
+            <a:off x="2262367" y="3675887"/>
+            <a:ext cx="7666959" cy="2377440"/>
           </a:xfrm>
           <a:prstGeom prst="rect">
             <a:avLst/>
           </a:prstGeom>
         </p:spPr>
       </p:pic>
-      <p:sp>
-        <p:nvSpPr>
-          <p:cNvPr id="7" name="TextBox 6"/>
-          <p:cNvSpPr txBox="1"/>
-          <p:nvPr/>
-        </p:nvSpPr>
-        <p:spPr>
-          <a:xfrm>
-            <a:off x="685800" y="4852416"/>
-            <a:ext cx="10820095" cy="1200912"/>
-          </a:xfrm>
-          <a:prstGeom prst="rect">
-            <a:avLst/>
-          </a:prstGeom>
-          <a:noFill/>
-        </p:spPr>
-        <p:txBody>
-          <a:bodyPr wrap="square" anchor="t">
-            <a:spAutoFit/>
-          </a:bodyPr>
-          <a:lstStyle/>
-          <a:p>
-            <a:r>
-              <a:rPr sz="2000" b="0">
-                <a:solidFill>
-                  <a:srgbClr val="1C1C1A"/>
-                </a:solidFill>
-                <a:latin typeface="Calibri"/>
-              </a:rPr>
-              <a:t>The notebook is a stack of cells on a screen, and the kernel has no opinion at all about that stack. The kernel sees the order you clicked run in. If you ran the third cell first, then the third cell ran first.</a:t>
-            </a:r>
-          </a:p>
-        </p:txBody>
-      </p:sp>
       <p:sp>
         <p:nvSpPr>
           <p:cNvPr id="8" name="Rectangle 7"/>
@@ -4616,7 +4674,7 @@
           <a:noFill/>
         </p:spPr>
         <p:txBody>
-          <a:bodyPr wrap="square" anchor="t">
+          <a:bodyPr wrap="square" anchor="t" lIns="0" rIns="0" tIns="0" bIns="0">
             <a:spAutoFit/>
           </a:bodyPr>
           <a:lstStyle/>
@@ -4650,7 +4708,7 @@
           <a:noFill/>
         </p:spPr>
         <p:txBody>
-          <a:bodyPr wrap="square" anchor="t">
+          <a:bodyPr wrap="square" anchor="t" lIns="0" rIns="0" tIns="0" bIns="0">
             <a:spAutoFit/>
           </a:bodyPr>
           <a:lstStyle/>
@@ -4800,7 +4858,7 @@
           <a:noFill/>
         </p:spPr>
         <p:txBody>
-          <a:bodyPr wrap="square" anchor="ctr">
+          <a:bodyPr wrap="square" anchor="ctr" lIns="0" rIns="0" tIns="0" bIns="0">
             <a:spAutoFit/>
           </a:bodyPr>
           <a:lstStyle/>
@@ -4869,8 +4927,8 @@
         </p:nvSpPr>
         <p:spPr>
           <a:xfrm>
-            <a:off x="685800" y="2589784"/>
-            <a:ext cx="10820095" cy="564896"/>
+            <a:off x="685800" y="2223008"/>
+            <a:ext cx="10820095" cy="910336"/>
           </a:xfrm>
           <a:prstGeom prst="rect">
             <a:avLst/>
@@ -4878,7 +4936,7 @@
           <a:noFill/>
         </p:spPr>
         <p:txBody>
-          <a:bodyPr wrap="square" anchor="t">
+          <a:bodyPr wrap="square" anchor="t" lIns="0" rIns="0" tIns="0" bIns="0">
             <a:spAutoFit/>
           </a:bodyPr>
           <a:lstStyle/>
@@ -4908,8 +4966,8 @@
         </p:nvSpPr>
         <p:spPr>
           <a:xfrm>
-            <a:off x="685800" y="3282696"/>
-            <a:ext cx="10820095" cy="1078992"/>
+            <a:off x="685800" y="3261360"/>
+            <a:ext cx="10820095" cy="1121664"/>
           </a:xfrm>
           <a:prstGeom prst="rect">
             <a:avLst/>
@@ -4952,8 +5010,8 @@
         </p:nvSpPr>
         <p:spPr>
           <a:xfrm>
-            <a:off x="685800" y="3282696"/>
-            <a:ext cx="50292" cy="1078992"/>
+            <a:off x="685800" y="3261360"/>
+            <a:ext cx="50292" cy="1121664"/>
           </a:xfrm>
           <a:prstGeom prst="rect">
             <a:avLst/>
@@ -4996,8 +5054,8 @@
         </p:nvSpPr>
         <p:spPr>
           <a:xfrm>
-            <a:off x="923544" y="3383280"/>
-            <a:ext cx="10417759" cy="896112"/>
+            <a:off x="923544" y="3361944"/>
+            <a:ext cx="10417759" cy="938784"/>
           </a:xfrm>
           <a:prstGeom prst="rect">
             <a:avLst/>
@@ -5005,7 +5063,7 @@
           <a:noFill/>
         </p:spPr>
         <p:txBody>
-          <a:bodyPr wrap="square" anchor="t">
+          <a:bodyPr wrap="square" anchor="t" lIns="0" rIns="0" tIns="0" bIns="0">
             <a:spAutoFit/>
           </a:bodyPr>
           <a:lstStyle/>
@@ -5067,8 +5125,8 @@
         </p:nvSpPr>
         <p:spPr>
           <a:xfrm>
-            <a:off x="685800" y="4526280"/>
-            <a:ext cx="10820095" cy="564896"/>
+            <a:off x="685800" y="4547615"/>
+            <a:ext cx="10820095" cy="910336"/>
           </a:xfrm>
           <a:prstGeom prst="rect">
             <a:avLst/>
@@ -5076,7 +5134,7 @@
           <a:noFill/>
         </p:spPr>
         <p:txBody>
-          <a:bodyPr wrap="square" anchor="t">
+          <a:bodyPr wrap="square" anchor="t" lIns="0" rIns="0" tIns="0" bIns="0">
             <a:spAutoFit/>
           </a:bodyPr>
           <a:lstStyle/>
@@ -5159,7 +5217,7 @@
           <a:noFill/>
         </p:spPr>
         <p:txBody>
-          <a:bodyPr wrap="square" anchor="t">
+          <a:bodyPr wrap="square" anchor="t" lIns="0" rIns="0" tIns="0" bIns="0">
             <a:spAutoFit/>
           </a:bodyPr>
           <a:lstStyle/>
@@ -5193,7 +5251,7 @@
           <a:noFill/>
         </p:spPr>
         <p:txBody>
-          <a:bodyPr wrap="square" anchor="t">
+          <a:bodyPr wrap="square" anchor="t" lIns="0" rIns="0" tIns="0" bIns="0">
             <a:spAutoFit/>
           </a:bodyPr>
           <a:lstStyle/>
@@ -5343,7 +5401,7 @@
           <a:noFill/>
         </p:spPr>
         <p:txBody>
-          <a:bodyPr wrap="square" anchor="ctr">
+          <a:bodyPr wrap="square" anchor="ctr" lIns="0" rIns="0" tIns="0" bIns="0">
             <a:spAutoFit/>
           </a:bodyPr>
           <a:lstStyle/>
@@ -5421,7 +5479,7 @@
           <a:noFill/>
         </p:spPr>
         <p:txBody>
-          <a:bodyPr wrap="square" anchor="t">
+          <a:bodyPr wrap="square" anchor="t" lIns="0" rIns="0" tIns="0" bIns="0">
             <a:spAutoFit/>
           </a:bodyPr>
           <a:lstStyle/>
@@ -5536,7 +5594,7 @@
           <a:noFill/>
         </p:spPr>
         <p:txBody>
-          <a:bodyPr wrap="square" anchor="t">
+          <a:bodyPr wrap="square" anchor="t" lIns="0" rIns="0" tIns="0" bIns="0">
             <a:spAutoFit/>
           </a:bodyPr>
           <a:lstStyle/>
@@ -5570,7 +5628,7 @@
           <a:noFill/>
         </p:spPr>
         <p:txBody>
-          <a:bodyPr wrap="square" anchor="t">
+          <a:bodyPr wrap="square" anchor="t" lIns="0" rIns="0" tIns="0" bIns="0">
             <a:spAutoFit/>
           </a:bodyPr>
           <a:lstStyle/>
@@ -5720,7 +5778,7 @@
           <a:noFill/>
         </p:spPr>
         <p:txBody>
-          <a:bodyPr wrap="square" anchor="ctr">
+          <a:bodyPr wrap="square" anchor="ctr" lIns="0" rIns="0" tIns="0" bIns="0">
             <a:spAutoFit/>
           </a:bodyPr>
           <a:lstStyle/>
@@ -5789,8 +5847,8 @@
         </p:nvSpPr>
         <p:spPr>
           <a:xfrm>
-            <a:off x="685800" y="2804160"/>
-            <a:ext cx="10820095" cy="542543"/>
+            <a:off x="685800" y="2803144"/>
+            <a:ext cx="10820095" cy="544576"/>
           </a:xfrm>
           <a:prstGeom prst="rect">
             <a:avLst/>
@@ -5833,8 +5891,8 @@
         </p:nvSpPr>
         <p:spPr>
           <a:xfrm>
-            <a:off x="685800" y="2804160"/>
-            <a:ext cx="50292" cy="542543"/>
+            <a:off x="685800" y="2803144"/>
+            <a:ext cx="50292" cy="544576"/>
           </a:xfrm>
           <a:prstGeom prst="rect">
             <a:avLst/>
@@ -5877,8 +5935,8 @@
         </p:nvSpPr>
         <p:spPr>
           <a:xfrm>
-            <a:off x="923544" y="2904744"/>
-            <a:ext cx="10417759" cy="359663"/>
+            <a:off x="923544" y="2903728"/>
+            <a:ext cx="10417759" cy="361696"/>
           </a:xfrm>
           <a:prstGeom prst="rect">
             <a:avLst/>
@@ -5886,7 +5944,7 @@
           <a:noFill/>
         </p:spPr>
         <p:txBody>
-          <a:bodyPr wrap="square" anchor="t">
+          <a:bodyPr wrap="square" anchor="t" lIns="0" rIns="0" tIns="0" bIns="0">
             <a:spAutoFit/>
           </a:bodyPr>
           <a:lstStyle/>
@@ -5916,7 +5974,7 @@
         </p:nvSpPr>
         <p:spPr>
           <a:xfrm>
-            <a:off x="685800" y="3511296"/>
+            <a:off x="685800" y="3512312"/>
             <a:ext cx="10820095" cy="1365504"/>
           </a:xfrm>
           <a:prstGeom prst="rect">
@@ -5925,7 +5983,7 @@
           <a:noFill/>
         </p:spPr>
         <p:txBody>
-          <a:bodyPr wrap="square" anchor="t">
+          <a:bodyPr wrap="square" anchor="t" lIns="0" rIns="0" tIns="0" bIns="0">
             <a:spAutoFit/>
           </a:bodyPr>
           <a:lstStyle/>
@@ -6024,7 +6082,7 @@
           <a:noFill/>
         </p:spPr>
         <p:txBody>
-          <a:bodyPr wrap="square" anchor="t">
+          <a:bodyPr wrap="square" anchor="t" lIns="0" rIns="0" tIns="0" bIns="0">
             <a:spAutoFit/>
           </a:bodyPr>
           <a:lstStyle/>
@@ -6058,7 +6116,7 @@
           <a:noFill/>
         </p:spPr>
         <p:txBody>
-          <a:bodyPr wrap="square" anchor="t">
+          <a:bodyPr wrap="square" anchor="t" lIns="0" rIns="0" tIns="0" bIns="0">
             <a:spAutoFit/>
           </a:bodyPr>
           <a:lstStyle/>
@@ -6208,7 +6266,7 @@
           <a:noFill/>
         </p:spPr>
         <p:txBody>
-          <a:bodyPr wrap="square" anchor="ctr">
+          <a:bodyPr wrap="square" anchor="ctr" lIns="0" rIns="0" tIns="0" bIns="0">
             <a:spAutoFit/>
           </a:bodyPr>
           <a:lstStyle/>
@@ -6271,7 +6329,7 @@
       </p:sp>
       <p:pic>
         <p:nvPicPr>
-          <p:cNvPr id="6" name="Picture 5" descr="4671c9f7b0e932df.png"/>
+          <p:cNvPr id="6" name="Picture 5" descr="48db783d6d6abd6c.png"/>
           <p:cNvPicPr>
             <a:picLocks noChangeAspect="1"/>
           </p:cNvPicPr>
@@ -6285,8 +6343,8 @@
         </p:blipFill>
         <p:spPr>
           <a:xfrm>
-            <a:off x="685800" y="1832107"/>
-            <a:ext cx="4652640" cy="4016744"/>
+            <a:off x="4491808" y="1627632"/>
+            <a:ext cx="3208077" cy="2769615"/>
           </a:xfrm>
           <a:prstGeom prst="rect">
             <a:avLst/>
@@ -6301,8 +6359,8 @@
         </p:nvSpPr>
         <p:spPr>
           <a:xfrm>
-            <a:off x="5771244" y="2239264"/>
-            <a:ext cx="5734650" cy="3202432"/>
+            <a:off x="685800" y="4506976"/>
+            <a:ext cx="10820095" cy="1546352"/>
           </a:xfrm>
           <a:prstGeom prst="rect">
             <a:avLst/>
@@ -6310,16 +6368,11 @@
           <a:noFill/>
         </p:spPr>
         <p:txBody>
-          <a:bodyPr wrap="square" anchor="t">
+          <a:bodyPr wrap="square" anchor="t" lIns="0" rIns="0" tIns="0" bIns="0">
             <a:spAutoFit/>
           </a:bodyPr>
           <a:lstStyle/>
           <a:p>
-            <a:pPr>
-              <a:spcAft>
-                <a:spcPts val="900"/>
-              </a:spcAft>
-            </a:pPr>
             <a:r>
               <a:rPr sz="2000" b="0">
                 <a:solidFill>
@@ -6327,39 +6380,7 @@
                 </a:solidFill>
                 <a:latin typeface="Calibri"/>
               </a:rPr>
-              <a:t>Restart the kernel, then run all cells from the top. You are back where you were, in a few seconds.</a:t>
-            </a:r>
-          </a:p>
-          <a:p>
-            <a:pPr>
-              <a:spcAft>
-                <a:spcPts val="900"/>
-              </a:spcAft>
-            </a:pPr>
-            <a:r>
-              <a:rPr sz="2000" b="0">
-                <a:solidFill>
-                  <a:srgbClr val="1C1C1A"/>
-                </a:solidFill>
-                <a:latin typeface="Calibri"/>
-              </a:rPr>
-              <a:t>The file on disk never changed. What you lost was the state on the bench, and the cells put that state straight back.</a:t>
-            </a:r>
-          </a:p>
-          <a:p>
-            <a:pPr>
-              <a:spcAft>
-                <a:spcPts val="900"/>
-              </a:spcAft>
-            </a:pPr>
-            <a:r>
-              <a:rPr sz="2000" b="0">
-                <a:solidFill>
-                  <a:srgbClr val="1C1C1A"/>
-                </a:solidFill>
-                <a:latin typeface="Calibri"/>
-              </a:rPr>
-              <a:t>Do the drill now on purpose, because you will do it many times this week.</a:t>
+              <a:t>Restart the kernel, then run all cells from the top. You are back where you were, in a few seconds. The file on disk never changed. What you lost was the state on the bench, and the cells put that state straight back. Do the drill now on purpose, because you will do it many times this week.</a:t>
             </a:r>
           </a:p>
         </p:txBody>
@@ -6425,7 +6446,7 @@
           <a:noFill/>
         </p:spPr>
         <p:txBody>
-          <a:bodyPr wrap="square" anchor="t">
+          <a:bodyPr wrap="square" anchor="t" lIns="0" rIns="0" tIns="0" bIns="0">
             <a:spAutoFit/>
           </a:bodyPr>
           <a:lstStyle/>
@@ -6459,7 +6480,7 @@
           <a:noFill/>
         </p:spPr>
         <p:txBody>
-          <a:bodyPr wrap="square" anchor="t">
+          <a:bodyPr wrap="square" anchor="t" lIns="0" rIns="0" tIns="0" bIns="0">
             <a:spAutoFit/>
           </a:bodyPr>
           <a:lstStyle/>
@@ -6609,7 +6630,7 @@
           <a:noFill/>
         </p:spPr>
         <p:txBody>
-          <a:bodyPr wrap="square" anchor="ctr">
+          <a:bodyPr wrap="square" anchor="ctr" lIns="0" rIns="0" tIns="0" bIns="0">
             <a:spAutoFit/>
           </a:bodyPr>
           <a:lstStyle/>
@@ -6687,7 +6708,7 @@
           <a:noFill/>
         </p:spPr>
         <p:txBody>
-          <a:bodyPr wrap="square" anchor="t">
+          <a:bodyPr wrap="square" anchor="t" lIns="0" rIns="0" tIns="0" bIns="0">
             <a:spAutoFit/>
           </a:bodyPr>
           <a:lstStyle/>
@@ -6721,7 +6742,7 @@
           <a:noFill/>
         </p:spPr>
         <p:txBody>
-          <a:bodyPr wrap="square" anchor="t">
+          <a:bodyPr wrap="square" anchor="t" lIns="0" rIns="0" tIns="0" bIns="0">
             <a:spAutoFit/>
           </a:bodyPr>
           <a:lstStyle/>
@@ -6755,7 +6776,7 @@
           <a:noFill/>
         </p:spPr>
         <p:txBody>
-          <a:bodyPr wrap="square" anchor="t">
+          <a:bodyPr wrap="square" anchor="t" lIns="0" rIns="0" tIns="0" bIns="0">
             <a:spAutoFit/>
           </a:bodyPr>
           <a:lstStyle/>
@@ -6789,7 +6810,7 @@
           <a:noFill/>
         </p:spPr>
         <p:txBody>
-          <a:bodyPr wrap="square" anchor="t">
+          <a:bodyPr wrap="square" anchor="t" lIns="0" rIns="0" tIns="0" bIns="0">
             <a:spAutoFit/>
           </a:bodyPr>
           <a:lstStyle/>
@@ -6823,7 +6844,7 @@
           <a:noFill/>
         </p:spPr>
         <p:txBody>
-          <a:bodyPr wrap="square" anchor="t">
+          <a:bodyPr wrap="square" anchor="t" lIns="0" rIns="0" tIns="0" bIns="0">
             <a:spAutoFit/>
           </a:bodyPr>
           <a:lstStyle/>
@@ -6857,7 +6878,7 @@
           <a:noFill/>
         </p:spPr>
         <p:txBody>
-          <a:bodyPr wrap="square" anchor="t">
+          <a:bodyPr wrap="square" anchor="t" lIns="0" rIns="0" tIns="0" bIns="0">
             <a:spAutoFit/>
           </a:bodyPr>
           <a:lstStyle/>
@@ -6891,7 +6912,7 @@
           <a:noFill/>
         </p:spPr>
         <p:txBody>
-          <a:bodyPr wrap="square" anchor="t">
+          <a:bodyPr wrap="square" anchor="t" lIns="0" rIns="0" tIns="0" bIns="0">
             <a:spAutoFit/>
           </a:bodyPr>
           <a:lstStyle/>
@@ -6925,7 +6946,7 @@
           <a:noFill/>
         </p:spPr>
         <p:txBody>
-          <a:bodyPr wrap="square" anchor="t">
+          <a:bodyPr wrap="square" anchor="t" lIns="0" rIns="0" tIns="0" bIns="0">
             <a:spAutoFit/>
           </a:bodyPr>
           <a:lstStyle/>
@@ -7003,7 +7024,7 @@
           <a:noFill/>
         </p:spPr>
         <p:txBody>
-          <a:bodyPr wrap="square" anchor="t">
+          <a:bodyPr wrap="square" anchor="t" lIns="0" rIns="0" tIns="0" bIns="0">
             <a:spAutoFit/>
           </a:bodyPr>
           <a:lstStyle/>
@@ -7037,7 +7058,7 @@
           <a:noFill/>
         </p:spPr>
         <p:txBody>
-          <a:bodyPr wrap="square" anchor="t">
+          <a:bodyPr wrap="square" anchor="t" lIns="0" rIns="0" tIns="0" bIns="0">
             <a:spAutoFit/>
           </a:bodyPr>
           <a:lstStyle/>
@@ -7134,7 +7155,7 @@
           <a:noFill/>
         </p:spPr>
         <p:txBody>
-          <a:bodyPr wrap="square" anchor="ctr">
+          <a:bodyPr wrap="square" anchor="ctr" lIns="0" rIns="0" tIns="0" bIns="0">
             <a:spAutoFit/>
           </a:bodyPr>
           <a:lstStyle/>
@@ -7478,7 +7499,7 @@
           <a:noFill/>
         </p:spPr>
         <p:txBody>
-          <a:bodyPr wrap="square" anchor="t">
+          <a:bodyPr wrap="square" anchor="t" lIns="0" rIns="0" tIns="0" bIns="0">
             <a:spAutoFit/>
           </a:bodyPr>
           <a:lstStyle/>
@@ -7512,7 +7533,7 @@
           <a:noFill/>
         </p:spPr>
         <p:txBody>
-          <a:bodyPr wrap="square" anchor="t">
+          <a:bodyPr wrap="square" anchor="t" lIns="0" rIns="0" tIns="0" bIns="0">
             <a:spAutoFit/>
           </a:bodyPr>
           <a:lstStyle/>
@@ -7662,7 +7683,7 @@
           <a:noFill/>
         </p:spPr>
         <p:txBody>
-          <a:bodyPr wrap="square" anchor="ctr">
+          <a:bodyPr wrap="square" anchor="ctr" lIns="0" rIns="0" tIns="0" bIns="0">
             <a:spAutoFit/>
           </a:bodyPr>
           <a:lstStyle/>
@@ -7723,9 +7744,96 @@
           </a:p>
         </p:txBody>
       </p:sp>
+      <p:sp>
+        <p:nvSpPr>
+          <p:cNvPr id="6" name="TextBox 5"/>
+          <p:cNvSpPr txBox="1"/>
+          <p:nvPr/>
+        </p:nvSpPr>
+        <p:spPr>
+          <a:xfrm>
+            <a:off x="685800" y="1627632"/>
+            <a:ext cx="10820095" cy="1930400"/>
+          </a:xfrm>
+          <a:prstGeom prst="rect">
+            <a:avLst/>
+          </a:prstGeom>
+          <a:noFill/>
+        </p:spPr>
+        <p:txBody>
+          <a:bodyPr wrap="square" anchor="t" lIns="0" rIns="0" tIns="0" bIns="0">
+            <a:spAutoFit/>
+          </a:bodyPr>
+          <a:lstStyle/>
+          <a:p>
+            <a:pPr>
+              <a:spcAft>
+                <a:spcPts val="900"/>
+              </a:spcAft>
+            </a:pPr>
+            <a:r>
+              <a:rPr sz="2000" b="0">
+                <a:solidFill>
+                  <a:srgbClr val="1C1C1A"/>
+                </a:solidFill>
+                <a:latin typeface="Calibri"/>
+              </a:rPr>
+              <a:t>str holds text, like the order id "KR4224" and the status "delivered".</a:t>
+            </a:r>
+          </a:p>
+          <a:p>
+            <a:pPr>
+              <a:spcAft>
+                <a:spcPts val="900"/>
+              </a:spcAft>
+            </a:pPr>
+            <a:r>
+              <a:rPr sz="2000" b="0">
+                <a:solidFill>
+                  <a:srgbClr val="1C1C1A"/>
+                </a:solidFill>
+                <a:latin typeface="Calibri"/>
+              </a:rPr>
+              <a:t>int holds a whole number, like the amount 1460.</a:t>
+            </a:r>
+          </a:p>
+          <a:p>
+            <a:pPr>
+              <a:spcAft>
+                <a:spcPts val="900"/>
+              </a:spcAft>
+            </a:pPr>
+            <a:r>
+              <a:rPr sz="2000" b="0">
+                <a:solidFill>
+                  <a:srgbClr val="1C1C1A"/>
+                </a:solidFill>
+                <a:latin typeface="Calibri"/>
+              </a:rPr>
+              <a:t>float holds a number with a decimal part, like 1460.5.</a:t>
+            </a:r>
+          </a:p>
+          <a:p>
+            <a:pPr>
+              <a:spcAft>
+                <a:spcPts val="900"/>
+              </a:spcAft>
+            </a:pPr>
+            <a:r>
+              <a:rPr sz="2000" b="0">
+                <a:solidFill>
+                  <a:srgbClr val="1C1C1A"/>
+                </a:solidFill>
+                <a:latin typeface="Calibri"/>
+              </a:rPr>
+              <a:t>bool holds True or False, which is what every comparison hands back.</a:t>
+            </a:r>
+          </a:p>
+        </p:txBody>
+      </p:sp>
       <p:pic>
         <p:nvPicPr>
-          <p:cNvPr id="6" name="Picture 5" descr="367e373c2c2bd6e9.png"/>
+          <p:cNvPr id="7" name="Picture 6" descr="30303fda5a6e110f.png"/>
           <p:cNvPicPr>
             <a:picLocks noChangeAspect="1"/>
           </p:cNvPicPr>
@@ -7739,101 +7847,14 @@
         </p:blipFill>
         <p:spPr>
           <a:xfrm>
-            <a:off x="685800" y="2372134"/>
-            <a:ext cx="4652640" cy="2936691"/>
+            <a:off x="4220590" y="3686047"/>
+            <a:ext cx="3750514" cy="2367280"/>
           </a:xfrm>
           <a:prstGeom prst="rect">
             <a:avLst/>
           </a:prstGeom>
         </p:spPr>
       </p:pic>
-      <p:sp>
-        <p:nvSpPr>
-          <p:cNvPr id="7" name="TextBox 6"/>
-          <p:cNvSpPr txBox="1"/>
-          <p:nvPr/>
-        </p:nvSpPr>
-        <p:spPr>
-          <a:xfrm>
-            <a:off x="5771244" y="2357120"/>
-            <a:ext cx="5734650" cy="2966720"/>
-          </a:xfrm>
-          <a:prstGeom prst="rect">
-            <a:avLst/>
-          </a:prstGeom>
-          <a:noFill/>
-        </p:spPr>
-        <p:txBody>
-          <a:bodyPr wrap="square" anchor="t">
-            <a:spAutoFit/>
-          </a:bodyPr>
-          <a:lstStyle/>
-          <a:p>
-            <a:pPr>
-              <a:spcAft>
-                <a:spcPts val="900"/>
-              </a:spcAft>
-            </a:pPr>
-            <a:r>
-              <a:rPr sz="2000" b="0">
-                <a:solidFill>
-                  <a:srgbClr val="1C1C1A"/>
-                </a:solidFill>
-                <a:latin typeface="Calibri"/>
-              </a:rPr>
-              <a:t>str holds text, like the order id "KR4224" and the status "delivered".</a:t>
-            </a:r>
-          </a:p>
-          <a:p>
-            <a:pPr>
-              <a:spcAft>
-                <a:spcPts val="900"/>
-              </a:spcAft>
-            </a:pPr>
-            <a:r>
-              <a:rPr sz="2000" b="0">
-                <a:solidFill>
-                  <a:srgbClr val="1C1C1A"/>
-                </a:solidFill>
-                <a:latin typeface="Calibri"/>
-              </a:rPr>
-              <a:t>int holds a whole number, like the amount 1460.</a:t>
-            </a:r>
-          </a:p>
-          <a:p>
-            <a:pPr>
-              <a:spcAft>
-                <a:spcPts val="900"/>
-              </a:spcAft>
-            </a:pPr>
-            <a:r>
-              <a:rPr sz="2000" b="0">
-                <a:solidFill>
-                  <a:srgbClr val="1C1C1A"/>
-                </a:solidFill>
-                <a:latin typeface="Calibri"/>
-              </a:rPr>
-              <a:t>float holds a number with a decimal part, like 1460.5.</a:t>
-            </a:r>
-          </a:p>
-          <a:p>
-            <a:pPr>
-              <a:spcAft>
-                <a:spcPts val="900"/>
-              </a:spcAft>
-            </a:pPr>
-            <a:r>
-              <a:rPr sz="2000" b="0">
-                <a:solidFill>
-                  <a:srgbClr val="1C1C1A"/>
-                </a:solidFill>
-                <a:latin typeface="Calibri"/>
-              </a:rPr>
-              <a:t>bool holds True or False, which is what every comparison hands back.</a:t>
-            </a:r>
-          </a:p>
-        </p:txBody>
-      </p:sp>
       <p:sp>
         <p:nvSpPr>
           <p:cNvPr id="8" name="Rectangle 7"/>
@@ -7895,7 +7916,7 @@
           <a:noFill/>
         </p:spPr>
         <p:txBody>
-          <a:bodyPr wrap="square" anchor="t">
+          <a:bodyPr wrap="square" anchor="t" lIns="0" rIns="0" tIns="0" bIns="0">
             <a:spAutoFit/>
           </a:bodyPr>
           <a:lstStyle/>
@@ -7929,7 +7950,7 @@
           <a:noFill/>
         </p:spPr>
         <p:txBody>
-          <a:bodyPr wrap="square" anchor="t">
+          <a:bodyPr wrap="square" anchor="t" lIns="0" rIns="0" tIns="0" bIns="0">
             <a:spAutoFit/>
           </a:bodyPr>
           <a:lstStyle/>
@@ -8079,7 +8100,7 @@
           <a:noFill/>
         </p:spPr>
         <p:txBody>
-          <a:bodyPr wrap="square" anchor="ctr">
+          <a:bodyPr wrap="square" anchor="ctr" lIns="0" rIns="0" tIns="0" bIns="0">
             <a:spAutoFit/>
           </a:bodyPr>
           <a:lstStyle/>
@@ -8140,9 +8161,323 @@
           </a:p>
         </p:txBody>
       </p:sp>
+      <p:sp>
+        <p:nvSpPr>
+          <p:cNvPr id="6" name="Rounded Rectangle 5"/>
+          <p:cNvSpPr/>
+          <p:nvPr/>
+        </p:nvSpPr>
+        <p:spPr>
+          <a:xfrm>
+            <a:off x="685800" y="1627632"/>
+            <a:ext cx="2076236" cy="475488"/>
+          </a:xfrm>
+          <a:prstGeom prst="roundRect">
+            <a:avLst/>
+          </a:prstGeom>
+          <a:solidFill>
+            <a:srgbClr val="FFFFFF"/>
+          </a:solidFill>
+          <a:ln w="9525">
+            <a:solidFill>
+              <a:srgbClr val="C9C9C2"/>
+            </a:solidFill>
+          </a:ln>
+          <a:effectLst/>
+        </p:spPr>
+        <p:style>
+          <a:lnRef idx="1">
+            <a:schemeClr val="accent1"/>
+          </a:lnRef>
+          <a:fillRef idx="3">
+            <a:schemeClr val="accent1"/>
+          </a:fillRef>
+          <a:effectRef idx="2">
+            <a:schemeClr val="accent1"/>
+          </a:effectRef>
+          <a:fontRef idx="minor">
+            <a:schemeClr val="lt1"/>
+          </a:fontRef>
+        </p:style>
+        <p:txBody>
+          <a:bodyPr rtlCol="0" anchor="ctr" wrap="square"/>
+          <a:lstStyle/>
+          <a:p>
+            <a:pPr algn="ctr"/>
+            <a:r>
+              <a:rPr sz="1200" b="0">
+                <a:solidFill>
+                  <a:srgbClr val="5F6360"/>
+                </a:solidFill>
+                <a:latin typeface="Calibri"/>
+              </a:rPr>
+              <a:t>open the workbench</a:t>
+            </a:r>
+          </a:p>
+        </p:txBody>
+      </p:sp>
+      <p:sp>
+        <p:nvSpPr>
+          <p:cNvPr id="7" name="Rounded Rectangle 6"/>
+          <p:cNvSpPr/>
+          <p:nvPr/>
+        </p:nvSpPr>
+        <p:spPr>
+          <a:xfrm>
+            <a:off x="2871764" y="1627632"/>
+            <a:ext cx="2076236" cy="475488"/>
+          </a:xfrm>
+          <a:prstGeom prst="roundRect">
+            <a:avLst/>
+          </a:prstGeom>
+          <a:solidFill>
+            <a:srgbClr val="FFFFFF"/>
+          </a:solidFill>
+          <a:ln w="9525">
+            <a:solidFill>
+              <a:srgbClr val="C9C9C2"/>
+            </a:solidFill>
+          </a:ln>
+          <a:effectLst/>
+        </p:spPr>
+        <p:style>
+          <a:lnRef idx="1">
+            <a:schemeClr val="accent1"/>
+          </a:lnRef>
+          <a:fillRef idx="3">
+            <a:schemeClr val="accent1"/>
+          </a:fillRef>
+          <a:effectRef idx="2">
+            <a:schemeClr val="accent1"/>
+          </a:effectRef>
+          <a:fontRef idx="minor">
+            <a:schemeClr val="lt1"/>
+          </a:fontRef>
+        </p:style>
+        <p:txBody>
+          <a:bodyPr rtlCol="0" anchor="ctr" wrap="square"/>
+          <a:lstStyle/>
+          <a:p>
+            <a:pPr algn="ctr"/>
+            <a:r>
+              <a:rPr sz="1200" b="0">
+                <a:solidFill>
+                  <a:srgbClr val="5F6360"/>
+                </a:solidFill>
+                <a:latin typeface="Calibri"/>
+              </a:rPr>
+              <a:t>the kernel remembers</a:t>
+            </a:r>
+          </a:p>
+        </p:txBody>
+      </p:sp>
+      <p:sp>
+        <p:nvSpPr>
+          <p:cNvPr id="8" name="Rounded Rectangle 7"/>
+          <p:cNvSpPr/>
+          <p:nvPr/>
+        </p:nvSpPr>
+        <p:spPr>
+          <a:xfrm>
+            <a:off x="5057729" y="1627632"/>
+            <a:ext cx="2076236" cy="475488"/>
+          </a:xfrm>
+          <a:prstGeom prst="roundRect">
+            <a:avLst/>
+          </a:prstGeom>
+          <a:solidFill>
+            <a:srgbClr val="FFFFFF"/>
+          </a:solidFill>
+          <a:ln w="9525">
+            <a:solidFill>
+              <a:srgbClr val="C9C9C2"/>
+            </a:solidFill>
+          </a:ln>
+          <a:effectLst/>
+        </p:spPr>
+        <p:style>
+          <a:lnRef idx="1">
+            <a:schemeClr val="accent1"/>
+          </a:lnRef>
+          <a:fillRef idx="3">
+            <a:schemeClr val="accent1"/>
+          </a:fillRef>
+          <a:effectRef idx="2">
+            <a:schemeClr val="accent1"/>
+          </a:effectRef>
+          <a:fontRef idx="minor">
+            <a:schemeClr val="lt1"/>
+          </a:fontRef>
+        </p:style>
+        <p:txBody>
+          <a:bodyPr rtlCol="0" anchor="ctr" wrap="square"/>
+          <a:lstStyle/>
+          <a:p>
+            <a:pPr algn="ctr"/>
+            <a:r>
+              <a:rPr sz="1200" b="0">
+                <a:solidFill>
+                  <a:srgbClr val="5F6360"/>
+                </a:solidFill>
+                <a:latin typeface="Calibri"/>
+              </a:rPr>
+              <a:t>type decides</a:t>
+            </a:r>
+          </a:p>
+        </p:txBody>
+      </p:sp>
+      <p:sp>
+        <p:nvSpPr>
+          <p:cNvPr id="9" name="Rounded Rectangle 8"/>
+          <p:cNvSpPr/>
+          <p:nvPr/>
+        </p:nvSpPr>
+        <p:spPr>
+          <a:xfrm>
+            <a:off x="7243693" y="1627632"/>
+            <a:ext cx="2076236" cy="475488"/>
+          </a:xfrm>
+          <a:prstGeom prst="roundRect">
+            <a:avLst/>
+          </a:prstGeom>
+          <a:solidFill>
+            <a:srgbClr val="FFFFFF"/>
+          </a:solidFill>
+          <a:ln w="9525">
+            <a:solidFill>
+              <a:srgbClr val="C9C9C2"/>
+            </a:solidFill>
+          </a:ln>
+          <a:effectLst/>
+        </p:spPr>
+        <p:style>
+          <a:lnRef idx="1">
+            <a:schemeClr val="accent1"/>
+          </a:lnRef>
+          <a:fillRef idx="3">
+            <a:schemeClr val="accent1"/>
+          </a:fillRef>
+          <a:effectRef idx="2">
+            <a:schemeClr val="accent1"/>
+          </a:effectRef>
+          <a:fontRef idx="minor">
+            <a:schemeClr val="lt1"/>
+          </a:fontRef>
+        </p:style>
+        <p:txBody>
+          <a:bodyPr rtlCol="0" anchor="ctr" wrap="square"/>
+          <a:lstStyle/>
+          <a:p>
+            <a:pPr algn="ctr"/>
+            <a:r>
+              <a:rPr sz="1200" b="0">
+                <a:solidFill>
+                  <a:srgbClr val="5F6360"/>
+                </a:solidFill>
+                <a:latin typeface="Calibri"/>
+              </a:rPr>
+              <a:t>walk the records</a:t>
+            </a:r>
+          </a:p>
+        </p:txBody>
+      </p:sp>
+      <p:sp>
+        <p:nvSpPr>
+          <p:cNvPr id="10" name="Rounded Rectangle 9"/>
+          <p:cNvSpPr/>
+          <p:nvPr/>
+        </p:nvSpPr>
+        <p:spPr>
+          <a:xfrm>
+            <a:off x="9429658" y="1627632"/>
+            <a:ext cx="2076236" cy="475488"/>
+          </a:xfrm>
+          <a:prstGeom prst="roundRect">
+            <a:avLst/>
+          </a:prstGeom>
+          <a:solidFill>
+            <a:srgbClr val="FFFFFF"/>
+          </a:solidFill>
+          <a:ln w="9525">
+            <a:solidFill>
+              <a:srgbClr val="C9C9C2"/>
+            </a:solidFill>
+          </a:ln>
+          <a:effectLst/>
+        </p:spPr>
+        <p:style>
+          <a:lnRef idx="1">
+            <a:schemeClr val="accent1"/>
+          </a:lnRef>
+          <a:fillRef idx="3">
+            <a:schemeClr val="accent1"/>
+          </a:fillRef>
+          <a:effectRef idx="2">
+            <a:schemeClr val="accent1"/>
+          </a:effectRef>
+          <a:fontRef idx="minor">
+            <a:schemeClr val="lt1"/>
+          </a:fontRef>
+        </p:style>
+        <p:txBody>
+          <a:bodyPr rtlCol="0" anchor="ctr" wrap="square"/>
+          <a:lstStyle/>
+          <a:p>
+            <a:pPr algn="ctr"/>
+            <a:r>
+              <a:rPr sz="1200" b="0">
+                <a:solidFill>
+                  <a:srgbClr val="5F6360"/>
+                </a:solidFill>
+                <a:latin typeface="Calibri"/>
+              </a:rPr>
+              <a:t>the business answer</a:t>
+            </a:r>
+          </a:p>
+        </p:txBody>
+      </p:sp>
+      <p:sp>
+        <p:nvSpPr>
+          <p:cNvPr id="11" name="TextBox 10"/>
+          <p:cNvSpPr txBox="1"/>
+          <p:nvPr/>
+        </p:nvSpPr>
+        <p:spPr>
+          <a:xfrm>
+            <a:off x="685800" y="2304288"/>
+            <a:ext cx="10820095" cy="910336"/>
+          </a:xfrm>
+          <a:prstGeom prst="rect">
+            <a:avLst/>
+          </a:prstGeom>
+          <a:noFill/>
+        </p:spPr>
+        <p:txBody>
+          <a:bodyPr wrap="square" anchor="t" lIns="0" rIns="0" tIns="0" bIns="0">
+            <a:spAutoFit/>
+          </a:bodyPr>
+          <a:lstStyle/>
+          <a:p>
+            <a:pPr>
+              <a:spcAft>
+                <a:spcPts val="900"/>
+              </a:spcAft>
+            </a:pPr>
+            <a:r>
+              <a:rPr sz="2000" b="0">
+                <a:solidFill>
+                  <a:srgbClr val="1C1C1A"/>
+                </a:solidFill>
+                <a:latin typeface="Calibri"/>
+              </a:rPr>
+              <a:t>Every order in this file is a Kalpa Retail order. The same thirty orders come back tomorrow as a file, and they come back again in Week 2 in pandas and in SQL.</a:t>
+            </a:r>
+          </a:p>
+        </p:txBody>
+      </p:sp>
       <p:pic>
         <p:nvPicPr>
-          <p:cNvPr id="6" name="Picture 5" descr="da192b0f3dd7050a.png"/>
+          <p:cNvPr id="12" name="Picture 11" descr="18ef9b8692bd3bb7.png"/>
           <p:cNvPicPr>
             <a:picLocks noChangeAspect="1"/>
           </p:cNvPicPr>
@@ -8156,7 +8491,7 @@
         </p:blipFill>
         <p:spPr>
           <a:xfrm>
-            <a:off x="685799" y="2929520"/>
+            <a:off x="685799" y="4608968"/>
             <a:ext cx="10820095" cy="511279"/>
           </a:xfrm>
           <a:prstGeom prst="rect">
@@ -8166,41 +8501,7 @@
       </p:pic>
       <p:sp>
         <p:nvSpPr>
-          <p:cNvPr id="7" name="TextBox 6"/>
-          <p:cNvSpPr txBox="1"/>
-          <p:nvPr/>
-        </p:nvSpPr>
-        <p:spPr>
-          <a:xfrm>
-            <a:off x="685800" y="4852416"/>
-            <a:ext cx="10820095" cy="1200912"/>
-          </a:xfrm>
-          <a:prstGeom prst="rect">
-            <a:avLst/>
-          </a:prstGeom>
-          <a:noFill/>
-        </p:spPr>
-        <p:txBody>
-          <a:bodyPr wrap="square" anchor="t">
-            <a:spAutoFit/>
-          </a:bodyPr>
-          <a:lstStyle/>
-          <a:p>
-            <a:r>
-              <a:rPr sz="2000" b="0">
-                <a:solidFill>
-                  <a:srgbClr val="1C1C1A"/>
-                </a:solidFill>
-                <a:latin typeface="Calibri"/>
-              </a:rPr>
-              <a:t>[open the workbench] &gt; [the kernel remembers] &gt; [type decides] &gt; [walk the records] &gt; [the business answer] Every order in this file is a Kalpa Retail order. The same thirty orders come back tomorrow as a file, and they come back again in Week 2 in pandas and in SQL.</a:t>
-            </a:r>
-          </a:p>
-        </p:txBody>
-      </p:sp>
-      <p:sp>
-        <p:nvSpPr>
-          <p:cNvPr id="8" name="Rectangle 7"/>
+          <p:cNvPr id="13" name="Rectangle 12"/>
           <p:cNvSpPr/>
           <p:nvPr/>
         </p:nvSpPr>
@@ -8244,7 +8545,7 @@
       </p:sp>
       <p:sp>
         <p:nvSpPr>
-          <p:cNvPr id="9" name="TextBox 8"/>
+          <p:cNvPr id="14" name="TextBox 13"/>
           <p:cNvSpPr txBox="1"/>
           <p:nvPr/>
         </p:nvSpPr>
@@ -8259,7 +8560,7 @@
           <a:noFill/>
         </p:spPr>
         <p:txBody>
-          <a:bodyPr wrap="square" anchor="t">
+          <a:bodyPr wrap="square" anchor="t" lIns="0" rIns="0" tIns="0" bIns="0">
             <a:spAutoFit/>
           </a:bodyPr>
           <a:lstStyle/>
@@ -8278,7 +8579,7 @@
       </p:sp>
       <p:sp>
         <p:nvSpPr>
-          <p:cNvPr id="10" name="TextBox 9"/>
+          <p:cNvPr id="15" name="TextBox 14"/>
           <p:cNvSpPr txBox="1"/>
           <p:nvPr/>
         </p:nvSpPr>
@@ -8293,7 +8594,7 @@
           <a:noFill/>
         </p:spPr>
         <p:txBody>
-          <a:bodyPr wrap="square" anchor="t">
+          <a:bodyPr wrap="square" anchor="t" lIns="0" rIns="0" tIns="0" bIns="0">
             <a:spAutoFit/>
           </a:bodyPr>
           <a:lstStyle/>
@@ -8443,7 +8744,7 @@
           <a:noFill/>
         </p:spPr>
         <p:txBody>
-          <a:bodyPr wrap="square" anchor="ctr">
+          <a:bodyPr wrap="square" anchor="ctr" lIns="0" rIns="0" tIns="0" bIns="0">
             <a:spAutoFit/>
           </a:bodyPr>
           <a:lstStyle/>
@@ -8512,8 +8813,8 @@
         </p:nvSpPr>
         <p:spPr>
           <a:xfrm>
-            <a:off x="685800" y="2629408"/>
-            <a:ext cx="10820095" cy="1347216"/>
+            <a:off x="685800" y="2597912"/>
+            <a:ext cx="10820095" cy="1410208"/>
           </a:xfrm>
           <a:prstGeom prst="rect">
             <a:avLst/>
@@ -8556,8 +8857,8 @@
         </p:nvSpPr>
         <p:spPr>
           <a:xfrm>
-            <a:off x="685800" y="2629408"/>
-            <a:ext cx="50292" cy="1347216"/>
+            <a:off x="685800" y="2597912"/>
+            <a:ext cx="50292" cy="1410208"/>
           </a:xfrm>
           <a:prstGeom prst="rect">
             <a:avLst/>
@@ -8600,8 +8901,8 @@
         </p:nvSpPr>
         <p:spPr>
           <a:xfrm>
-            <a:off x="923544" y="2729992"/>
-            <a:ext cx="10417759" cy="1164336"/>
+            <a:off x="923544" y="2698496"/>
+            <a:ext cx="10417759" cy="1227328"/>
           </a:xfrm>
           <a:prstGeom prst="rect">
             <a:avLst/>
@@ -8609,7 +8910,7 @@
           <a:noFill/>
         </p:spPr>
         <p:txBody>
-          <a:bodyPr wrap="square" anchor="t">
+          <a:bodyPr wrap="square" anchor="t" lIns="0" rIns="0" tIns="0" bIns="0">
             <a:spAutoFit/>
           </a:bodyPr>
           <a:lstStyle/>
@@ -8687,7 +8988,7 @@
         </p:nvSpPr>
         <p:spPr>
           <a:xfrm>
-            <a:off x="685800" y="4141216"/>
+            <a:off x="685800" y="4172712"/>
             <a:ext cx="10820095" cy="910336"/>
           </a:xfrm>
           <a:prstGeom prst="rect">
@@ -8696,7 +8997,7 @@
           <a:noFill/>
         </p:spPr>
         <p:txBody>
-          <a:bodyPr wrap="square" anchor="t">
+          <a:bodyPr wrap="square" anchor="t" lIns="0" rIns="0" tIns="0" bIns="0">
             <a:spAutoFit/>
           </a:bodyPr>
           <a:lstStyle/>
@@ -8779,7 +9080,7 @@
           <a:noFill/>
         </p:spPr>
         <p:txBody>
-          <a:bodyPr wrap="square" anchor="t">
+          <a:bodyPr wrap="square" anchor="t" lIns="0" rIns="0" tIns="0" bIns="0">
             <a:spAutoFit/>
           </a:bodyPr>
           <a:lstStyle/>
@@ -8813,7 +9114,7 @@
           <a:noFill/>
         </p:spPr>
         <p:txBody>
-          <a:bodyPr wrap="square" anchor="t">
+          <a:bodyPr wrap="square" anchor="t" lIns="0" rIns="0" tIns="0" bIns="0">
             <a:spAutoFit/>
           </a:bodyPr>
           <a:lstStyle/>
@@ -8963,7 +9264,7 @@
           <a:noFill/>
         </p:spPr>
         <p:txBody>
-          <a:bodyPr wrap="square" anchor="ctr">
+          <a:bodyPr wrap="square" anchor="ctr" lIns="0" rIns="0" tIns="0" bIns="0">
             <a:spAutoFit/>
           </a:bodyPr>
           <a:lstStyle/>
@@ -9032,8 +9333,8 @@
         </p:nvSpPr>
         <p:spPr>
           <a:xfrm>
-            <a:off x="685800" y="2574544"/>
-            <a:ext cx="10820095" cy="1347216"/>
+            <a:off x="685800" y="2370328"/>
+            <a:ext cx="10820095" cy="1410208"/>
           </a:xfrm>
           <a:prstGeom prst="rect">
             <a:avLst/>
@@ -9076,8 +9377,8 @@
         </p:nvSpPr>
         <p:spPr>
           <a:xfrm>
-            <a:off x="685800" y="2574544"/>
-            <a:ext cx="50292" cy="1347216"/>
+            <a:off x="685800" y="2370328"/>
+            <a:ext cx="50292" cy="1410208"/>
           </a:xfrm>
           <a:prstGeom prst="rect">
             <a:avLst/>
@@ -9120,8 +9421,8 @@
         </p:nvSpPr>
         <p:spPr>
           <a:xfrm>
-            <a:off x="923544" y="2675128"/>
-            <a:ext cx="10417759" cy="1164336"/>
+            <a:off x="923544" y="2470912"/>
+            <a:ext cx="10417759" cy="1227328"/>
           </a:xfrm>
           <a:prstGeom prst="rect">
             <a:avLst/>
@@ -9129,7 +9430,7 @@
           <a:noFill/>
         </p:spPr>
         <p:txBody>
-          <a:bodyPr wrap="square" anchor="t">
+          <a:bodyPr wrap="square" anchor="t" lIns="0" rIns="0" tIns="0" bIns="0">
             <a:spAutoFit/>
           </a:bodyPr>
           <a:lstStyle/>
@@ -9175,8 +9476,8 @@
         </p:nvSpPr>
         <p:spPr>
           <a:xfrm>
-            <a:off x="685800" y="4086352"/>
-            <a:ext cx="10820095" cy="1020064"/>
+            <a:off x="685800" y="3945128"/>
+            <a:ext cx="10820095" cy="1365504"/>
           </a:xfrm>
           <a:prstGeom prst="rect">
             <a:avLst/>
@@ -9184,7 +9485,7 @@
           <a:noFill/>
         </p:spPr>
         <p:txBody>
-          <a:bodyPr wrap="square" anchor="t">
+          <a:bodyPr wrap="square" anchor="t" lIns="0" rIns="0" tIns="0" bIns="0">
             <a:spAutoFit/>
           </a:bodyPr>
           <a:lstStyle/>
@@ -9283,7 +9584,7 @@
           <a:noFill/>
         </p:spPr>
         <p:txBody>
-          <a:bodyPr wrap="square" anchor="t">
+          <a:bodyPr wrap="square" anchor="t" lIns="0" rIns="0" tIns="0" bIns="0">
             <a:spAutoFit/>
           </a:bodyPr>
           <a:lstStyle/>
@@ -9317,7 +9618,7 @@
           <a:noFill/>
         </p:spPr>
         <p:txBody>
-          <a:bodyPr wrap="square" anchor="t">
+          <a:bodyPr wrap="square" anchor="t" lIns="0" rIns="0" tIns="0" bIns="0">
             <a:spAutoFit/>
           </a:bodyPr>
           <a:lstStyle/>
@@ -9467,7 +9768,7 @@
           <a:noFill/>
         </p:spPr>
         <p:txBody>
-          <a:bodyPr wrap="square" anchor="ctr">
+          <a:bodyPr wrap="square" anchor="ctr" lIns="0" rIns="0" tIns="0" bIns="0">
             <a:spAutoFit/>
           </a:bodyPr>
           <a:lstStyle/>
@@ -9530,7 +9831,7 @@
       </p:sp>
       <p:pic>
         <p:nvPicPr>
-          <p:cNvPr id="6" name="Picture 5" descr="e19648cbc1ce0117.png"/>
+          <p:cNvPr id="6" name="Picture 5" descr="dea4710cc4c1eeb0.png"/>
           <p:cNvPicPr>
             <a:picLocks noChangeAspect="1"/>
           </p:cNvPicPr>
@@ -9560,8 +9861,8 @@
         </p:nvSpPr>
         <p:spPr>
           <a:xfrm>
-            <a:off x="5771244" y="2237232"/>
-            <a:ext cx="5734650" cy="810768"/>
+            <a:off x="5771244" y="2214880"/>
+            <a:ext cx="5734650" cy="833120"/>
           </a:xfrm>
           <a:prstGeom prst="rect">
             <a:avLst/>
@@ -9604,8 +9905,8 @@
         </p:nvSpPr>
         <p:spPr>
           <a:xfrm>
-            <a:off x="5771244" y="2237232"/>
-            <a:ext cx="50292" cy="810768"/>
+            <a:off x="5771244" y="2214880"/>
+            <a:ext cx="50292" cy="833120"/>
           </a:xfrm>
           <a:prstGeom prst="rect">
             <a:avLst/>
@@ -9648,8 +9949,8 @@
         </p:nvSpPr>
         <p:spPr>
           <a:xfrm>
-            <a:off x="6008988" y="2337816"/>
-            <a:ext cx="5332314" cy="627888"/>
+            <a:off x="6008988" y="2315464"/>
+            <a:ext cx="5332314" cy="650239"/>
           </a:xfrm>
           <a:prstGeom prst="rect">
             <a:avLst/>
@@ -9657,7 +9958,7 @@
           <a:noFill/>
         </p:spPr>
         <p:txBody>
-          <a:bodyPr wrap="square" anchor="t">
+          <a:bodyPr wrap="square" anchor="t" lIns="0" rIns="0" tIns="0" bIns="0">
             <a:spAutoFit/>
           </a:bodyPr>
           <a:lstStyle/>
@@ -9704,7 +10005,7 @@
         <p:spPr>
           <a:xfrm>
             <a:off x="5771244" y="3212592"/>
-            <a:ext cx="5734650" cy="810768"/>
+            <a:ext cx="5734650" cy="833120"/>
           </a:xfrm>
           <a:prstGeom prst="rect">
             <a:avLst/>
@@ -9748,7 +10049,7 @@
         <p:spPr>
           <a:xfrm>
             <a:off x="5771244" y="3212592"/>
-            <a:ext cx="50292" cy="810768"/>
+            <a:ext cx="50292" cy="833120"/>
           </a:xfrm>
           <a:prstGeom prst="rect">
             <a:avLst/>
@@ -9792,7 +10093,7 @@
         <p:spPr>
           <a:xfrm>
             <a:off x="6008988" y="3313176"/>
-            <a:ext cx="5332314" cy="627888"/>
+            <a:ext cx="5332314" cy="650239"/>
           </a:xfrm>
           <a:prstGeom prst="rect">
             <a:avLst/>
@@ -9800,7 +10101,7 @@
           <a:noFill/>
         </p:spPr>
         <p:txBody>
-          <a:bodyPr wrap="square" anchor="t">
+          <a:bodyPr wrap="square" anchor="t" lIns="0" rIns="0" tIns="0" bIns="0">
             <a:spAutoFit/>
           </a:bodyPr>
           <a:lstStyle/>
@@ -9830,7 +10131,7 @@
         </p:nvSpPr>
         <p:spPr>
           <a:xfrm>
-            <a:off x="5771244" y="4187952"/>
+            <a:off x="5771244" y="4210304"/>
             <a:ext cx="5734650" cy="1255776"/>
           </a:xfrm>
           <a:prstGeom prst="rect">
@@ -9839,7 +10140,7 @@
           <a:noFill/>
         </p:spPr>
         <p:txBody>
-          <a:bodyPr wrap="square" anchor="t">
+          <a:bodyPr wrap="square" anchor="t" lIns="0" rIns="0" tIns="0" bIns="0">
             <a:spAutoFit/>
           </a:bodyPr>
           <a:lstStyle/>
@@ -9922,7 +10223,7 @@
           <a:noFill/>
         </p:spPr>
         <p:txBody>
-          <a:bodyPr wrap="square" anchor="t">
+          <a:bodyPr wrap="square" anchor="t" lIns="0" rIns="0" tIns="0" bIns="0">
             <a:spAutoFit/>
           </a:bodyPr>
           <a:lstStyle/>
@@ -9956,7 +10257,7 @@
           <a:noFill/>
         </p:spPr>
         <p:txBody>
-          <a:bodyPr wrap="square" anchor="t">
+          <a:bodyPr wrap="square" anchor="t" lIns="0" rIns="0" tIns="0" bIns="0">
             <a:spAutoFit/>
           </a:bodyPr>
           <a:lstStyle/>
@@ -10106,7 +10407,7 @@
           <a:noFill/>
         </p:spPr>
         <p:txBody>
-          <a:bodyPr wrap="square" anchor="ctr">
+          <a:bodyPr wrap="square" anchor="ctr" lIns="0" rIns="0" tIns="0" bIns="0">
             <a:spAutoFit/>
           </a:bodyPr>
           <a:lstStyle/>
@@ -10184,7 +10485,7 @@
           <a:noFill/>
         </p:spPr>
         <p:txBody>
-          <a:bodyPr wrap="square" anchor="t">
+          <a:bodyPr wrap="square" anchor="t" lIns="0" rIns="0" tIns="0" bIns="0">
             <a:spAutoFit/>
           </a:bodyPr>
           <a:lstStyle/>
@@ -10283,7 +10584,7 @@
           <a:noFill/>
         </p:spPr>
         <p:txBody>
-          <a:bodyPr wrap="square" anchor="t">
+          <a:bodyPr wrap="square" anchor="t" lIns="0" rIns="0" tIns="0" bIns="0">
             <a:spAutoFit/>
           </a:bodyPr>
           <a:lstStyle/>
@@ -10317,7 +10618,7 @@
           <a:noFill/>
         </p:spPr>
         <p:txBody>
-          <a:bodyPr wrap="square" anchor="t">
+          <a:bodyPr wrap="square" anchor="t" lIns="0" rIns="0" tIns="0" bIns="0">
             <a:spAutoFit/>
           </a:bodyPr>
           <a:lstStyle/>
@@ -10467,7 +10768,7 @@
           <a:noFill/>
         </p:spPr>
         <p:txBody>
-          <a:bodyPr wrap="square" anchor="ctr">
+          <a:bodyPr wrap="square" anchor="ctr" lIns="0" rIns="0" tIns="0" bIns="0">
             <a:spAutoFit/>
           </a:bodyPr>
           <a:lstStyle/>
@@ -10545,7 +10846,7 @@
           <a:noFill/>
         </p:spPr>
         <p:txBody>
-          <a:bodyPr wrap="square" anchor="t">
+          <a:bodyPr wrap="square" anchor="t" lIns="0" rIns="0" tIns="0" bIns="0">
             <a:spAutoFit/>
           </a:bodyPr>
           <a:lstStyle/>
@@ -10660,7 +10961,7 @@
           <a:noFill/>
         </p:spPr>
         <p:txBody>
-          <a:bodyPr wrap="square" anchor="t">
+          <a:bodyPr wrap="square" anchor="t" lIns="0" rIns="0" tIns="0" bIns="0">
             <a:spAutoFit/>
           </a:bodyPr>
           <a:lstStyle/>
@@ -10694,7 +10995,7 @@
           <a:noFill/>
         </p:spPr>
         <p:txBody>
-          <a:bodyPr wrap="square" anchor="t">
+          <a:bodyPr wrap="square" anchor="t" lIns="0" rIns="0" tIns="0" bIns="0">
             <a:spAutoFit/>
           </a:bodyPr>
           <a:lstStyle/>
@@ -10844,7 +11145,7 @@
           <a:noFill/>
         </p:spPr>
         <p:txBody>
-          <a:bodyPr wrap="square" anchor="ctr">
+          <a:bodyPr wrap="square" anchor="ctr" lIns="0" rIns="0" tIns="0" bIns="0">
             <a:spAutoFit/>
           </a:bodyPr>
           <a:lstStyle/>
@@ -10922,7 +11223,7 @@
           <a:noFill/>
         </p:spPr>
         <p:txBody>
-          <a:bodyPr wrap="square" anchor="t">
+          <a:bodyPr wrap="square" anchor="t" lIns="0" rIns="0" tIns="0" bIns="0">
             <a:spAutoFit/>
           </a:bodyPr>
           <a:lstStyle/>
@@ -11069,7 +11370,7 @@
           <a:noFill/>
         </p:spPr>
         <p:txBody>
-          <a:bodyPr wrap="square" anchor="t">
+          <a:bodyPr wrap="square" anchor="t" lIns="0" rIns="0" tIns="0" bIns="0">
             <a:spAutoFit/>
           </a:bodyPr>
           <a:lstStyle/>
@@ -11103,7 +11404,7 @@
           <a:noFill/>
         </p:spPr>
         <p:txBody>
-          <a:bodyPr wrap="square" anchor="t">
+          <a:bodyPr wrap="square" anchor="t" lIns="0" rIns="0" tIns="0" bIns="0">
             <a:spAutoFit/>
           </a:bodyPr>
           <a:lstStyle/>
@@ -11253,7 +11554,7 @@
           <a:noFill/>
         </p:spPr>
         <p:txBody>
-          <a:bodyPr wrap="square" anchor="ctr">
+          <a:bodyPr wrap="square" anchor="ctr" lIns="0" rIns="0" tIns="0" bIns="0">
             <a:spAutoFit/>
           </a:bodyPr>
           <a:lstStyle/>
@@ -11323,7 +11624,7 @@
         <p:spPr>
           <a:xfrm>
             <a:off x="685800" y="1627632"/>
-            <a:ext cx="10820095" cy="965200"/>
+            <a:ext cx="10820095" cy="850899"/>
           </a:xfrm>
           <a:prstGeom prst="rect">
             <a:avLst/>
@@ -11367,7 +11668,7 @@
         <p:spPr>
           <a:xfrm>
             <a:off x="685800" y="1627632"/>
-            <a:ext cx="50292" cy="965200"/>
+            <a:ext cx="50292" cy="850899"/>
           </a:xfrm>
           <a:prstGeom prst="rect">
             <a:avLst/>
@@ -11411,7 +11712,7 @@
         <p:spPr>
           <a:xfrm>
             <a:off x="941832" y="1719072"/>
-            <a:ext cx="10362895" cy="818896"/>
+            <a:ext cx="10362895" cy="704595"/>
           </a:xfrm>
           <a:prstGeom prst="rect">
             <a:avLst/>
@@ -11419,13 +11720,13 @@
           <a:noFill/>
         </p:spPr>
         <p:txBody>
-          <a:bodyPr wrap="square" anchor="ctr">
+          <a:bodyPr wrap="square" anchor="ctr" lIns="0" rIns="0" tIns="0" bIns="0">
             <a:spAutoFit/>
           </a:bodyPr>
           <a:lstStyle/>
           <a:p>
             <a:r>
-              <a:rPr sz="2000" b="1">
+              <a:rPr sz="1700" b="1">
                 <a:solidFill>
                   <a:srgbClr val="2B4A7D"/>
                 </a:solidFill>
@@ -11434,7 +11735,7 @@
               <a:t>The claim. </a:t>
             </a:r>
             <a:r>
-              <a:rPr sz="2000" b="0">
+              <a:rPr sz="1700" b="0">
                 <a:solidFill>
                   <a:srgbClr val="1C1C1A"/>
                 </a:solidFill>
@@ -11454,8 +11755,8 @@
           <p:nvPr/>
         </p:nvGraphicFramePr>
         <p:xfrm>
-          <a:off x="685800" y="2757424"/>
-          <a:ext cx="10820095" cy="2325624"/>
+          <a:off x="685800" y="2643124"/>
+          <a:ext cx="10820094" cy="2083816"/>
         </p:xfrm>
         <a:graphic>
           <a:graphicData uri="http://schemas.openxmlformats.org/drawingml/2006/table">
@@ -11464,17 +11765,17 @@
                 <a:tableStyleId>{2D5ABB26-0587-4C30-8999-92F81FD0307C}</a:tableStyleId>
               </a:tblPr>
               <a:tblGrid>
-                <a:gridCol w="5410047"/>
-                <a:gridCol w="5410048"/>
+                <a:gridCol w="3522828"/>
+                <a:gridCol w="7297266"/>
               </a:tblGrid>
-              <a:tr h="387096">
+              <a:tr h="352552">
                 <a:tc>
                   <a:txBody>
                     <a:bodyPr/>
                     <a:lstStyle/>
                     <a:p>
                       <a:r>
-                        <a:rPr sz="1600" b="1">
+                        <a:rPr sz="1400" b="1">
                           <a:solidFill>
                             <a:srgbClr val="FFFFFF"/>
                           </a:solidFill>
@@ -11496,7 +11797,7 @@
                     <a:lstStyle/>
                     <a:p>
                       <a:r>
-                        <a:rPr sz="1600" b="1">
+                        <a:rPr sz="1400" b="1">
                           <a:solidFill>
                             <a:srgbClr val="FFFFFF"/>
                           </a:solidFill>
@@ -11513,14 +11814,14 @@
                   </a:tcPr>
                 </a:tc>
               </a:tr>
-              <a:tr h="646176">
+              <a:tr h="577088">
                 <a:tc>
                   <a:txBody>
                     <a:bodyPr/>
                     <a:lstStyle/>
                     <a:p>
                       <a:r>
-                        <a:rPr sz="1500" b="0">
+                        <a:rPr sz="1300" b="0">
                           <a:solidFill>
                             <a:srgbClr val="1C1C1A"/>
                           </a:solidFill>
@@ -11542,7 +11843,7 @@
                     <a:lstStyle/>
                     <a:p>
                       <a:r>
-                        <a:rPr sz="1500" b="0">
+                        <a:rPr sz="1300" b="0">
                           <a:solidFill>
                             <a:srgbClr val="1C1C1A"/>
                           </a:solidFill>
@@ -11559,14 +11860,14 @@
                   </a:tcPr>
                 </a:tc>
               </a:tr>
-              <a:tr h="646176">
+              <a:tr h="577088">
                 <a:tc>
                   <a:txBody>
                     <a:bodyPr/>
                     <a:lstStyle/>
                     <a:p>
                       <a:r>
-                        <a:rPr sz="1500" b="0">
+                        <a:rPr sz="1300" b="0">
                           <a:solidFill>
                             <a:srgbClr val="1C1C1A"/>
                           </a:solidFill>
@@ -11588,7 +11889,7 @@
                     <a:lstStyle/>
                     <a:p>
                       <a:r>
-                        <a:rPr sz="1500" b="0">
+                        <a:rPr sz="1300" b="0">
                           <a:solidFill>
                             <a:srgbClr val="1C1C1A"/>
                           </a:solidFill>
@@ -11605,14 +11906,14 @@
                   </a:tcPr>
                 </a:tc>
               </a:tr>
-              <a:tr h="646176">
+              <a:tr h="577088">
                 <a:tc>
                   <a:txBody>
                     <a:bodyPr/>
                     <a:lstStyle/>
                     <a:p>
                       <a:r>
-                        <a:rPr sz="1500" b="0">
+                        <a:rPr sz="1300" b="0">
                           <a:solidFill>
                             <a:srgbClr val="1C1C1A"/>
                           </a:solidFill>
@@ -11634,7 +11935,7 @@
                     <a:lstStyle/>
                     <a:p>
                       <a:r>
-                        <a:rPr sz="1500" b="0">
+                        <a:rPr sz="1300" b="0">
                           <a:solidFill>
                             <a:srgbClr val="1C1C1A"/>
                           </a:solidFill>
@@ -11663,8 +11964,8 @@
         </p:nvSpPr>
         <p:spPr>
           <a:xfrm>
-            <a:off x="685800" y="5339080"/>
-            <a:ext cx="10820095" cy="965200"/>
+            <a:off x="685800" y="4982972"/>
+            <a:ext cx="10820095" cy="850899"/>
           </a:xfrm>
           <a:prstGeom prst="rect">
             <a:avLst/>
@@ -11707,8 +12008,8 @@
         </p:nvSpPr>
         <p:spPr>
           <a:xfrm>
-            <a:off x="685800" y="5339080"/>
-            <a:ext cx="50292" cy="965200"/>
+            <a:off x="685800" y="4982972"/>
+            <a:ext cx="50292" cy="850899"/>
           </a:xfrm>
           <a:prstGeom prst="rect">
             <a:avLst/>
@@ -11751,8 +12052,8 @@
         </p:nvSpPr>
         <p:spPr>
           <a:xfrm>
-            <a:off x="941832" y="5430520"/>
-            <a:ext cx="10362895" cy="818896"/>
+            <a:off x="941832" y="5074412"/>
+            <a:ext cx="10362895" cy="704595"/>
           </a:xfrm>
           <a:prstGeom prst="rect">
             <a:avLst/>
@@ -11760,13 +12061,13 @@
           <a:noFill/>
         </p:spPr>
         <p:txBody>
-          <a:bodyPr wrap="square" anchor="ctr">
+          <a:bodyPr wrap="square" anchor="ctr" lIns="0" rIns="0" tIns="0" bIns="0">
             <a:spAutoFit/>
           </a:bodyPr>
           <a:lstStyle/>
           <a:p>
             <a:r>
-              <a:rPr sz="2000" b="1">
+              <a:rPr sz="1700" b="1">
                 <a:solidFill>
                   <a:srgbClr val="2B4A7D"/>
                 </a:solidFill>
@@ -11775,7 +12076,7 @@
               <a:t>The mental model. </a:t>
             </a:r>
             <a:r>
-              <a:rPr sz="2000" b="0">
+              <a:rPr sz="1700" b="0">
                 <a:solidFill>
                   <a:srgbClr val="1C1C1A"/>
                 </a:solidFill>
@@ -11847,7 +12148,7 @@
           <a:noFill/>
         </p:spPr>
         <p:txBody>
-          <a:bodyPr wrap="square" anchor="t">
+          <a:bodyPr wrap="square" anchor="t" lIns="0" rIns="0" tIns="0" bIns="0">
             <a:spAutoFit/>
           </a:bodyPr>
           <a:lstStyle/>
@@ -11881,7 +12182,7 @@
           <a:noFill/>
         </p:spPr>
         <p:txBody>
-          <a:bodyPr wrap="square" anchor="t">
+          <a:bodyPr wrap="square" anchor="t" lIns="0" rIns="0" tIns="0" bIns="0">
             <a:spAutoFit/>
           </a:bodyPr>
           <a:lstStyle/>
@@ -12031,7 +12332,7 @@
           <a:noFill/>
         </p:spPr>
         <p:txBody>
-          <a:bodyPr wrap="square" anchor="ctr">
+          <a:bodyPr wrap="square" anchor="ctr" lIns="0" rIns="0" tIns="0" bIns="0">
             <a:spAutoFit/>
           </a:bodyPr>
           <a:lstStyle/>
@@ -12100,8 +12401,8 @@
         </p:nvSpPr>
         <p:spPr>
           <a:xfrm>
-            <a:off x="685800" y="2802128"/>
-            <a:ext cx="10820095" cy="1347216"/>
+            <a:off x="685800" y="2597912"/>
+            <a:ext cx="10820095" cy="1410208"/>
           </a:xfrm>
           <a:prstGeom prst="rect">
             <a:avLst/>
@@ -12144,8 +12445,8 @@
         </p:nvSpPr>
         <p:spPr>
           <a:xfrm>
-            <a:off x="685800" y="2802128"/>
-            <a:ext cx="50292" cy="1347216"/>
+            <a:off x="685800" y="2597912"/>
+            <a:ext cx="50292" cy="1410208"/>
           </a:xfrm>
           <a:prstGeom prst="rect">
             <a:avLst/>
@@ -12188,8 +12489,8 @@
         </p:nvSpPr>
         <p:spPr>
           <a:xfrm>
-            <a:off x="923544" y="2902712"/>
-            <a:ext cx="10417759" cy="1164336"/>
+            <a:off x="923544" y="2698496"/>
+            <a:ext cx="10417759" cy="1227328"/>
           </a:xfrm>
           <a:prstGeom prst="rect">
             <a:avLst/>
@@ -12197,7 +12498,7 @@
           <a:noFill/>
         </p:spPr>
         <p:txBody>
-          <a:bodyPr wrap="square" anchor="t">
+          <a:bodyPr wrap="square" anchor="t" lIns="0" rIns="0" tIns="0" bIns="0">
             <a:spAutoFit/>
           </a:bodyPr>
           <a:lstStyle/>
@@ -12275,8 +12576,8 @@
         </p:nvSpPr>
         <p:spPr>
           <a:xfrm>
-            <a:off x="685800" y="4313936"/>
-            <a:ext cx="10820095" cy="564896"/>
+            <a:off x="685800" y="4172712"/>
+            <a:ext cx="10820095" cy="910336"/>
           </a:xfrm>
           <a:prstGeom prst="rect">
             <a:avLst/>
@@ -12284,7 +12585,7 @@
           <a:noFill/>
         </p:spPr>
         <p:txBody>
-          <a:bodyPr wrap="square" anchor="t">
+          <a:bodyPr wrap="square" anchor="t" lIns="0" rIns="0" tIns="0" bIns="0">
             <a:spAutoFit/>
           </a:bodyPr>
           <a:lstStyle/>
@@ -12367,7 +12668,7 @@
           <a:noFill/>
         </p:spPr>
         <p:txBody>
-          <a:bodyPr wrap="square" anchor="t">
+          <a:bodyPr wrap="square" anchor="t" lIns="0" rIns="0" tIns="0" bIns="0">
             <a:spAutoFit/>
           </a:bodyPr>
           <a:lstStyle/>
@@ -12401,7 +12702,7 @@
           <a:noFill/>
         </p:spPr>
         <p:txBody>
-          <a:bodyPr wrap="square" anchor="t">
+          <a:bodyPr wrap="square" anchor="t" lIns="0" rIns="0" tIns="0" bIns="0">
             <a:spAutoFit/>
           </a:bodyPr>
           <a:lstStyle/>
@@ -12551,7 +12852,7 @@
           <a:noFill/>
         </p:spPr>
         <p:txBody>
-          <a:bodyPr wrap="square" anchor="ctr">
+          <a:bodyPr wrap="square" anchor="ctr" lIns="0" rIns="0" tIns="0" bIns="0">
             <a:spAutoFit/>
           </a:bodyPr>
           <a:lstStyle/>
@@ -12614,7 +12915,7 @@
       </p:sp>
       <p:pic>
         <p:nvPicPr>
-          <p:cNvPr id="6" name="Picture 5" descr="ae8eef98e83e6670.png"/>
+          <p:cNvPr id="6" name="Picture 5" descr="d98b9cc313d70196.png"/>
           <p:cNvPicPr>
             <a:picLocks noChangeAspect="1"/>
           </p:cNvPicPr>
@@ -12644,8 +12945,8 @@
         </p:nvSpPr>
         <p:spPr>
           <a:xfrm>
-            <a:off x="5771244" y="2054352"/>
-            <a:ext cx="5734650" cy="2151887"/>
+            <a:off x="5771244" y="1992376"/>
+            <a:ext cx="5734650" cy="2275840"/>
           </a:xfrm>
           <a:prstGeom prst="rect">
             <a:avLst/>
@@ -12688,8 +12989,8 @@
         </p:nvSpPr>
         <p:spPr>
           <a:xfrm>
-            <a:off x="5771244" y="2054352"/>
-            <a:ext cx="50292" cy="2151887"/>
+            <a:off x="5771244" y="1992376"/>
+            <a:ext cx="50292" cy="2275840"/>
           </a:xfrm>
           <a:prstGeom prst="rect">
             <a:avLst/>
@@ -12732,8 +13033,8 @@
         </p:nvSpPr>
         <p:spPr>
           <a:xfrm>
-            <a:off x="6008988" y="2154936"/>
-            <a:ext cx="5332314" cy="1969007"/>
+            <a:off x="6008988" y="2092960"/>
+            <a:ext cx="5332314" cy="2092959"/>
           </a:xfrm>
           <a:prstGeom prst="rect">
             <a:avLst/>
@@ -12741,7 +13042,7 @@
           <a:noFill/>
         </p:spPr>
         <p:txBody>
-          <a:bodyPr wrap="square" anchor="t">
+          <a:bodyPr wrap="square" anchor="t" lIns="0" rIns="0" tIns="0" bIns="0">
             <a:spAutoFit/>
           </a:bodyPr>
           <a:lstStyle/>
@@ -12867,7 +13168,7 @@
         </p:nvSpPr>
         <p:spPr>
           <a:xfrm>
-            <a:off x="5771244" y="4370831"/>
+            <a:off x="5771244" y="4432808"/>
             <a:ext cx="5734650" cy="1255776"/>
           </a:xfrm>
           <a:prstGeom prst="rect">
@@ -12876,7 +13177,7 @@
           <a:noFill/>
         </p:spPr>
         <p:txBody>
-          <a:bodyPr wrap="square" anchor="t">
+          <a:bodyPr wrap="square" anchor="t" lIns="0" rIns="0" tIns="0" bIns="0">
             <a:spAutoFit/>
           </a:bodyPr>
           <a:lstStyle/>
@@ -12959,7 +13260,7 @@
           <a:noFill/>
         </p:spPr>
         <p:txBody>
-          <a:bodyPr wrap="square" anchor="t">
+          <a:bodyPr wrap="square" anchor="t" lIns="0" rIns="0" tIns="0" bIns="0">
             <a:spAutoFit/>
           </a:bodyPr>
           <a:lstStyle/>
@@ -12993,7 +13294,7 @@
           <a:noFill/>
         </p:spPr>
         <p:txBody>
-          <a:bodyPr wrap="square" anchor="t">
+          <a:bodyPr wrap="square" anchor="t" lIns="0" rIns="0" tIns="0" bIns="0">
             <a:spAutoFit/>
           </a:bodyPr>
           <a:lstStyle/>
@@ -13143,7 +13444,7 @@
           <a:noFill/>
         </p:spPr>
         <p:txBody>
-          <a:bodyPr wrap="square" anchor="ctr">
+          <a:bodyPr wrap="square" anchor="ctr" lIns="0" rIns="0" tIns="0" bIns="0">
             <a:spAutoFit/>
           </a:bodyPr>
           <a:lstStyle/>
@@ -13212,8 +13513,8 @@
         </p:nvSpPr>
         <p:spPr>
           <a:xfrm>
-            <a:off x="685800" y="2551176"/>
-            <a:ext cx="10820095" cy="564896"/>
+            <a:off x="685800" y="2367280"/>
+            <a:ext cx="10820095" cy="910336"/>
           </a:xfrm>
           <a:prstGeom prst="rect">
             <a:avLst/>
@@ -13221,7 +13522,7 @@
           <a:noFill/>
         </p:spPr>
         <p:txBody>
-          <a:bodyPr wrap="square" anchor="t">
+          <a:bodyPr wrap="square" anchor="t" lIns="0" rIns="0" tIns="0" bIns="0">
             <a:spAutoFit/>
           </a:bodyPr>
           <a:lstStyle/>
@@ -13251,8 +13552,8 @@
         </p:nvSpPr>
         <p:spPr>
           <a:xfrm>
-            <a:off x="685800" y="3244088"/>
-            <a:ext cx="10820095" cy="810768"/>
+            <a:off x="685800" y="3405632"/>
+            <a:ext cx="10820095" cy="833120"/>
           </a:xfrm>
           <a:prstGeom prst="rect">
             <a:avLst/>
@@ -13295,8 +13596,8 @@
         </p:nvSpPr>
         <p:spPr>
           <a:xfrm>
-            <a:off x="685800" y="3244088"/>
-            <a:ext cx="50292" cy="810768"/>
+            <a:off x="685800" y="3405632"/>
+            <a:ext cx="50292" cy="833120"/>
           </a:xfrm>
           <a:prstGeom prst="rect">
             <a:avLst/>
@@ -13339,8 +13640,8 @@
         </p:nvSpPr>
         <p:spPr>
           <a:xfrm>
-            <a:off x="923544" y="3344672"/>
-            <a:ext cx="10417759" cy="627888"/>
+            <a:off x="923544" y="3506216"/>
+            <a:ext cx="10417759" cy="650239"/>
           </a:xfrm>
           <a:prstGeom prst="rect">
             <a:avLst/>
@@ -13348,7 +13649,7 @@
           <a:noFill/>
         </p:spPr>
         <p:txBody>
-          <a:bodyPr wrap="square" anchor="t">
+          <a:bodyPr wrap="square" anchor="t" lIns="0" rIns="0" tIns="0" bIns="0">
             <a:spAutoFit/>
           </a:bodyPr>
           <a:lstStyle/>
@@ -13394,7 +13695,7 @@
         </p:nvSpPr>
         <p:spPr>
           <a:xfrm>
-            <a:off x="685800" y="4219448"/>
+            <a:off x="685800" y="4403344"/>
             <a:ext cx="10820095" cy="910336"/>
           </a:xfrm>
           <a:prstGeom prst="rect">
@@ -13403,7 +13704,7 @@
           <a:noFill/>
         </p:spPr>
         <p:txBody>
-          <a:bodyPr wrap="square" anchor="t">
+          <a:bodyPr wrap="square" anchor="t" lIns="0" rIns="0" tIns="0" bIns="0">
             <a:spAutoFit/>
           </a:bodyPr>
           <a:lstStyle/>
@@ -13486,7 +13787,7 @@
           <a:noFill/>
         </p:spPr>
         <p:txBody>
-          <a:bodyPr wrap="square" anchor="t">
+          <a:bodyPr wrap="square" anchor="t" lIns="0" rIns="0" tIns="0" bIns="0">
             <a:spAutoFit/>
           </a:bodyPr>
           <a:lstStyle/>
@@ -13520,7 +13821,7 @@
           <a:noFill/>
         </p:spPr>
         <p:txBody>
-          <a:bodyPr wrap="square" anchor="t">
+          <a:bodyPr wrap="square" anchor="t" lIns="0" rIns="0" tIns="0" bIns="0">
             <a:spAutoFit/>
           </a:bodyPr>
           <a:lstStyle/>
@@ -13670,7 +13971,7 @@
           <a:noFill/>
         </p:spPr>
         <p:txBody>
-          <a:bodyPr wrap="square" anchor="ctr">
+          <a:bodyPr wrap="square" anchor="ctr" lIns="0" rIns="0" tIns="0" bIns="0">
             <a:spAutoFit/>
           </a:bodyPr>
           <a:lstStyle/>
@@ -13739,8 +14040,8 @@
         </p:nvSpPr>
         <p:spPr>
           <a:xfrm>
-            <a:off x="685800" y="2930144"/>
-            <a:ext cx="10820095" cy="1820672"/>
+            <a:off x="685800" y="2757424"/>
+            <a:ext cx="10820095" cy="2166112"/>
           </a:xfrm>
           <a:prstGeom prst="rect">
             <a:avLst/>
@@ -13748,7 +14049,7 @@
           <a:noFill/>
         </p:spPr>
         <p:txBody>
-          <a:bodyPr wrap="square" anchor="t">
+          <a:bodyPr wrap="square" anchor="t" lIns="0" rIns="0" tIns="0" bIns="0">
             <a:spAutoFit/>
           </a:bodyPr>
           <a:lstStyle/>
@@ -13863,7 +14164,7 @@
           <a:noFill/>
         </p:spPr>
         <p:txBody>
-          <a:bodyPr wrap="square" anchor="t">
+          <a:bodyPr wrap="square" anchor="t" lIns="0" rIns="0" tIns="0" bIns="0">
             <a:spAutoFit/>
           </a:bodyPr>
           <a:lstStyle/>
@@ -13897,7 +14198,7 @@
           <a:noFill/>
         </p:spPr>
         <p:txBody>
-          <a:bodyPr wrap="square" anchor="t">
+          <a:bodyPr wrap="square" anchor="t" lIns="0" rIns="0" tIns="0" bIns="0">
             <a:spAutoFit/>
           </a:bodyPr>
           <a:lstStyle/>
@@ -14047,7 +14348,7 @@
           <a:noFill/>
         </p:spPr>
         <p:txBody>
-          <a:bodyPr wrap="square" anchor="ctr">
+          <a:bodyPr wrap="square" anchor="ctr" lIns="0" rIns="0" tIns="0" bIns="0">
             <a:spAutoFit/>
           </a:bodyPr>
           <a:lstStyle/>
@@ -14110,7 +14411,7 @@
       </p:sp>
       <p:pic>
         <p:nvPicPr>
-          <p:cNvPr id="6" name="Picture 5" descr="d31fcd36e73b95e8.png"/>
+          <p:cNvPr id="6" name="Picture 5" descr="d1f54a66c111c316.png"/>
           <p:cNvPicPr>
             <a:picLocks noChangeAspect="1"/>
           </p:cNvPicPr>
@@ -14141,7 +14442,7 @@
         <p:spPr>
           <a:xfrm>
             <a:off x="5771244" y="1627632"/>
-            <a:ext cx="5734650" cy="1883664"/>
+            <a:ext cx="5734650" cy="1987295"/>
           </a:xfrm>
           <a:prstGeom prst="rect">
             <a:avLst/>
@@ -14185,7 +14486,7 @@
         <p:spPr>
           <a:xfrm>
             <a:off x="5771244" y="1627632"/>
-            <a:ext cx="50292" cy="1883664"/>
+            <a:ext cx="50292" cy="1987295"/>
           </a:xfrm>
           <a:prstGeom prst="rect">
             <a:avLst/>
@@ -14229,7 +14530,7 @@
         <p:spPr>
           <a:xfrm>
             <a:off x="6008988" y="1728216"/>
-            <a:ext cx="5332314" cy="1700784"/>
+            <a:ext cx="5332314" cy="1804415"/>
           </a:xfrm>
           <a:prstGeom prst="rect">
             <a:avLst/>
@@ -14237,7 +14538,7 @@
           <a:noFill/>
         </p:spPr>
         <p:txBody>
-          <a:bodyPr wrap="square" anchor="t">
+          <a:bodyPr wrap="square" anchor="t" lIns="0" rIns="0" tIns="0" bIns="0">
             <a:spAutoFit/>
           </a:bodyPr>
           <a:lstStyle/>
@@ -14338,8 +14639,8 @@
         </p:nvSpPr>
         <p:spPr>
           <a:xfrm>
-            <a:off x="5771244" y="3675887"/>
-            <a:ext cx="5734650" cy="542543"/>
+            <a:off x="5771244" y="3779519"/>
+            <a:ext cx="5734650" cy="544576"/>
           </a:xfrm>
           <a:prstGeom prst="rect">
             <a:avLst/>
@@ -14382,8 +14683,8 @@
         </p:nvSpPr>
         <p:spPr>
           <a:xfrm>
-            <a:off x="5771244" y="3675887"/>
-            <a:ext cx="50292" cy="542543"/>
+            <a:off x="5771244" y="3779519"/>
+            <a:ext cx="50292" cy="544576"/>
           </a:xfrm>
           <a:prstGeom prst="rect">
             <a:avLst/>
@@ -14426,8 +14727,8 @@
         </p:nvSpPr>
         <p:spPr>
           <a:xfrm>
-            <a:off x="6008988" y="3776472"/>
-            <a:ext cx="5332314" cy="359663"/>
+            <a:off x="6008988" y="3880104"/>
+            <a:ext cx="5332314" cy="361696"/>
           </a:xfrm>
           <a:prstGeom prst="rect">
             <a:avLst/>
@@ -14435,7 +14736,7 @@
           <a:noFill/>
         </p:spPr>
         <p:txBody>
-          <a:bodyPr wrap="square" anchor="t">
+          <a:bodyPr wrap="square" anchor="t" lIns="0" rIns="0" tIns="0" bIns="0">
             <a:spAutoFit/>
           </a:bodyPr>
           <a:lstStyle/>
@@ -14465,7 +14766,7 @@
         </p:nvSpPr>
         <p:spPr>
           <a:xfrm>
-            <a:off x="5771244" y="4383024"/>
+            <a:off x="5771244" y="4488687"/>
             <a:ext cx="5734650" cy="1255776"/>
           </a:xfrm>
           <a:prstGeom prst="rect">
@@ -14474,7 +14775,7 @@
           <a:noFill/>
         </p:spPr>
         <p:txBody>
-          <a:bodyPr wrap="square" anchor="t">
+          <a:bodyPr wrap="square" anchor="t" lIns="0" rIns="0" tIns="0" bIns="0">
             <a:spAutoFit/>
           </a:bodyPr>
           <a:lstStyle/>
@@ -14557,7 +14858,7 @@
           <a:noFill/>
         </p:spPr>
         <p:txBody>
-          <a:bodyPr wrap="square" anchor="t">
+          <a:bodyPr wrap="square" anchor="t" lIns="0" rIns="0" tIns="0" bIns="0">
             <a:spAutoFit/>
           </a:bodyPr>
           <a:lstStyle/>
@@ -14591,7 +14892,7 @@
           <a:noFill/>
         </p:spPr>
         <p:txBody>
-          <a:bodyPr wrap="square" anchor="t">
+          <a:bodyPr wrap="square" anchor="t" lIns="0" rIns="0" tIns="0" bIns="0">
             <a:spAutoFit/>
           </a:bodyPr>
           <a:lstStyle/>
@@ -14741,7 +15042,7 @@
           <a:noFill/>
         </p:spPr>
         <p:txBody>
-          <a:bodyPr wrap="square" anchor="ctr">
+          <a:bodyPr wrap="square" anchor="ctr" lIns="0" rIns="0" tIns="0" bIns="0">
             <a:spAutoFit/>
           </a:bodyPr>
           <a:lstStyle/>
@@ -14810,8 +15111,8 @@
         </p:nvSpPr>
         <p:spPr>
           <a:xfrm>
-            <a:off x="685800" y="2007616"/>
-            <a:ext cx="10820095" cy="1883664"/>
+            <a:off x="685800" y="1627632"/>
+            <a:ext cx="10820095" cy="1987295"/>
           </a:xfrm>
           <a:prstGeom prst="rect">
             <a:avLst/>
@@ -14854,8 +15155,8 @@
         </p:nvSpPr>
         <p:spPr>
           <a:xfrm>
-            <a:off x="685800" y="2007616"/>
-            <a:ext cx="50292" cy="1883664"/>
+            <a:off x="685800" y="1627632"/>
+            <a:ext cx="50292" cy="1987295"/>
           </a:xfrm>
           <a:prstGeom prst="rect">
             <a:avLst/>
@@ -14898,8 +15199,8 @@
         </p:nvSpPr>
         <p:spPr>
           <a:xfrm>
-            <a:off x="923544" y="2108200"/>
-            <a:ext cx="10417759" cy="1700784"/>
+            <a:off x="923544" y="1728216"/>
+            <a:ext cx="10417759" cy="1804415"/>
           </a:xfrm>
           <a:prstGeom prst="rect">
             <a:avLst/>
@@ -14907,7 +15208,7 @@
           <a:noFill/>
         </p:spPr>
         <p:txBody>
-          <a:bodyPr wrap="square" anchor="t">
+          <a:bodyPr wrap="square" anchor="t" lIns="0" rIns="0" tIns="0" bIns="0">
             <a:spAutoFit/>
           </a:bodyPr>
           <a:lstStyle/>
@@ -15008,8 +15309,8 @@
         </p:nvSpPr>
         <p:spPr>
           <a:xfrm>
-            <a:off x="685800" y="4055871"/>
-            <a:ext cx="10820095" cy="542543"/>
+            <a:off x="685800" y="3779519"/>
+            <a:ext cx="10820095" cy="544576"/>
           </a:xfrm>
           <a:prstGeom prst="rect">
             <a:avLst/>
@@ -15052,8 +15353,8 @@
         </p:nvSpPr>
         <p:spPr>
           <a:xfrm>
-            <a:off x="685800" y="4055871"/>
-            <a:ext cx="50292" cy="542543"/>
+            <a:off x="685800" y="3779519"/>
+            <a:ext cx="50292" cy="544576"/>
           </a:xfrm>
           <a:prstGeom prst="rect">
             <a:avLst/>
@@ -15096,8 +15397,8 @@
         </p:nvSpPr>
         <p:spPr>
           <a:xfrm>
-            <a:off x="923544" y="4156456"/>
-            <a:ext cx="10417759" cy="359663"/>
+            <a:off x="923544" y="3880104"/>
+            <a:ext cx="10417759" cy="361696"/>
           </a:xfrm>
           <a:prstGeom prst="rect">
             <a:avLst/>
@@ -15105,7 +15406,7 @@
           <a:noFill/>
         </p:spPr>
         <p:txBody>
-          <a:bodyPr wrap="square" anchor="t">
+          <a:bodyPr wrap="square" anchor="t" lIns="0" rIns="0" tIns="0" bIns="0">
             <a:spAutoFit/>
           </a:bodyPr>
           <a:lstStyle/>
@@ -15135,8 +15436,8 @@
         </p:nvSpPr>
         <p:spPr>
           <a:xfrm>
-            <a:off x="685800" y="4763008"/>
-            <a:ext cx="10820095" cy="910336"/>
+            <a:off x="685800" y="4488687"/>
+            <a:ext cx="10820095" cy="1255776"/>
           </a:xfrm>
           <a:prstGeom prst="rect">
             <a:avLst/>
@@ -15144,7 +15445,7 @@
           <a:noFill/>
         </p:spPr>
         <p:txBody>
-          <a:bodyPr wrap="square" anchor="t">
+          <a:bodyPr wrap="square" anchor="t" lIns="0" rIns="0" tIns="0" bIns="0">
             <a:spAutoFit/>
           </a:bodyPr>
           <a:lstStyle/>
@@ -15227,7 +15528,7 @@
           <a:noFill/>
         </p:spPr>
         <p:txBody>
-          <a:bodyPr wrap="square" anchor="t">
+          <a:bodyPr wrap="square" anchor="t" lIns="0" rIns="0" tIns="0" bIns="0">
             <a:spAutoFit/>
           </a:bodyPr>
           <a:lstStyle/>
@@ -15261,7 +15562,7 @@
           <a:noFill/>
         </p:spPr>
         <p:txBody>
-          <a:bodyPr wrap="square" anchor="t">
+          <a:bodyPr wrap="square" anchor="t" lIns="0" rIns="0" tIns="0" bIns="0">
             <a:spAutoFit/>
           </a:bodyPr>
           <a:lstStyle/>
@@ -15411,7 +15712,7 @@
           <a:noFill/>
         </p:spPr>
         <p:txBody>
-          <a:bodyPr wrap="square" anchor="ctr">
+          <a:bodyPr wrap="square" anchor="ctr" lIns="0" rIns="0" tIns="0" bIns="0">
             <a:spAutoFit/>
           </a:bodyPr>
           <a:lstStyle/>
@@ -15489,7 +15790,7 @@
           <a:noFill/>
         </p:spPr>
         <p:txBody>
-          <a:bodyPr wrap="square" anchor="t">
+          <a:bodyPr wrap="square" anchor="t" lIns="0" rIns="0" tIns="0" bIns="0">
             <a:spAutoFit/>
           </a:bodyPr>
           <a:lstStyle/>
@@ -15604,7 +15905,7 @@
           <a:noFill/>
         </p:spPr>
         <p:txBody>
-          <a:bodyPr wrap="square" anchor="t">
+          <a:bodyPr wrap="square" anchor="t" lIns="0" rIns="0" tIns="0" bIns="0">
             <a:spAutoFit/>
           </a:bodyPr>
           <a:lstStyle/>
@@ -15638,7 +15939,7 @@
           <a:noFill/>
         </p:spPr>
         <p:txBody>
-          <a:bodyPr wrap="square" anchor="t">
+          <a:bodyPr wrap="square" anchor="t" lIns="0" rIns="0" tIns="0" bIns="0">
             <a:spAutoFit/>
           </a:bodyPr>
           <a:lstStyle/>
@@ -15788,7 +16089,7 @@
           <a:noFill/>
         </p:spPr>
         <p:txBody>
-          <a:bodyPr wrap="square" anchor="ctr">
+          <a:bodyPr wrap="square" anchor="ctr" lIns="0" rIns="0" tIns="0" bIns="0">
             <a:spAutoFit/>
           </a:bodyPr>
           <a:lstStyle/>
@@ -15851,7 +16152,7 @@
       </p:sp>
       <p:pic>
         <p:nvPicPr>
-          <p:cNvPr id="6" name="Picture 5" descr="05dff095a4474c64.png"/>
+          <p:cNvPr id="6" name="Picture 5" descr="e4528b0d887bbc55.png"/>
           <p:cNvPicPr>
             <a:picLocks noChangeAspect="1"/>
           </p:cNvPicPr>
@@ -15882,7 +16183,7 @@
         <p:spPr>
           <a:xfrm>
             <a:off x="5771244" y="1627632"/>
-            <a:ext cx="5734650" cy="1883664"/>
+            <a:ext cx="5734650" cy="1770887"/>
           </a:xfrm>
           <a:prstGeom prst="rect">
             <a:avLst/>
@@ -15926,7 +16227,7 @@
         <p:spPr>
           <a:xfrm>
             <a:off x="5771244" y="1627632"/>
-            <a:ext cx="50292" cy="1883664"/>
+            <a:ext cx="50292" cy="1770887"/>
           </a:xfrm>
           <a:prstGeom prst="rect">
             <a:avLst/>
@@ -15970,7 +16271,7 @@
         <p:spPr>
           <a:xfrm>
             <a:off x="6008988" y="1728216"/>
-            <a:ext cx="5332314" cy="1700784"/>
+            <a:ext cx="5332314" cy="1588008"/>
           </a:xfrm>
           <a:prstGeom prst="rect">
             <a:avLst/>
@@ -15978,7 +16279,7 @@
           <a:noFill/>
         </p:spPr>
         <p:txBody>
-          <a:bodyPr wrap="square" anchor="t">
+          <a:bodyPr wrap="square" anchor="t" lIns="0" rIns="0" tIns="0" bIns="0">
             <a:spAutoFit/>
           </a:bodyPr>
           <a:lstStyle/>
@@ -15989,7 +16290,7 @@
               </a:spcAft>
             </a:pPr>
             <a:r>
-              <a:rPr sz="1600" b="0">
+              <a:rPr sz="1400" b="0">
                 <a:solidFill>
                   <a:srgbClr val="E4ECF7"/>
                 </a:solidFill>
@@ -16005,7 +16306,7 @@
               </a:spcAft>
             </a:pPr>
             <a:r>
-              <a:rPr sz="1600" b="0">
+              <a:rPr sz="1400" b="0">
                 <a:solidFill>
                   <a:srgbClr val="E4ECF7"/>
                 </a:solidFill>
@@ -16021,7 +16322,7 @@
               </a:spcAft>
             </a:pPr>
             <a:r>
-              <a:rPr sz="1600" b="0">
+              <a:rPr sz="1400" b="0">
                 <a:solidFill>
                   <a:srgbClr val="E4ECF7"/>
                 </a:solidFill>
@@ -16037,7 +16338,7 @@
               </a:spcAft>
             </a:pPr>
             <a:r>
-              <a:rPr sz="1600" b="0">
+              <a:rPr sz="1400" b="0">
                 <a:solidFill>
                   <a:srgbClr val="E4ECF7"/>
                 </a:solidFill>
@@ -16060,7 +16361,7 @@
               </a:spcAft>
             </a:pPr>
             <a:r>
-              <a:rPr sz="1600" b="0">
+              <a:rPr sz="1400" b="0">
                 <a:solidFill>
                   <a:srgbClr val="E4ECF7"/>
                 </a:solidFill>
@@ -16079,8 +16380,8 @@
         </p:nvSpPr>
         <p:spPr>
           <a:xfrm>
-            <a:off x="5771244" y="3675887"/>
-            <a:ext cx="5734650" cy="542543"/>
+            <a:off x="5771244" y="3563112"/>
+            <a:ext cx="5734650" cy="508508"/>
           </a:xfrm>
           <a:prstGeom prst="rect">
             <a:avLst/>
@@ -16123,8 +16424,8 @@
         </p:nvSpPr>
         <p:spPr>
           <a:xfrm>
-            <a:off x="5771244" y="3675887"/>
-            <a:ext cx="50292" cy="542543"/>
+            <a:off x="5771244" y="3563112"/>
+            <a:ext cx="50292" cy="508508"/>
           </a:xfrm>
           <a:prstGeom prst="rect">
             <a:avLst/>
@@ -16167,8 +16468,8 @@
         </p:nvSpPr>
         <p:spPr>
           <a:xfrm>
-            <a:off x="6008988" y="3776472"/>
-            <a:ext cx="5332314" cy="359663"/>
+            <a:off x="6008988" y="3663696"/>
+            <a:ext cx="5332314" cy="325628"/>
           </a:xfrm>
           <a:prstGeom prst="rect">
             <a:avLst/>
@@ -16176,7 +16477,7 @@
           <a:noFill/>
         </p:spPr>
         <p:txBody>
-          <a:bodyPr wrap="square" anchor="t">
+          <a:bodyPr wrap="square" anchor="t" lIns="0" rIns="0" tIns="0" bIns="0">
             <a:spAutoFit/>
           </a:bodyPr>
           <a:lstStyle/>
@@ -16187,7 +16488,7 @@
               </a:spcAft>
             </a:pPr>
             <a:r>
-              <a:rPr sz="1600" b="0">
+              <a:rPr sz="1400" b="0">
                 <a:solidFill>
                   <a:srgbClr val="E4ECF7"/>
                 </a:solidFill>
@@ -16206,8 +16507,8 @@
         </p:nvSpPr>
         <p:spPr>
           <a:xfrm>
-            <a:off x="5771244" y="4383024"/>
-            <a:ext cx="5734650" cy="1710944"/>
+            <a:off x="5771244" y="4236212"/>
+            <a:ext cx="5734650" cy="1503680"/>
           </a:xfrm>
           <a:prstGeom prst="rect">
             <a:avLst/>
@@ -16215,18 +16516,18 @@
           <a:noFill/>
         </p:spPr>
         <p:txBody>
-          <a:bodyPr wrap="square" anchor="t">
+          <a:bodyPr wrap="square" anchor="t" lIns="0" rIns="0" tIns="0" bIns="0">
             <a:spAutoFit/>
           </a:bodyPr>
           <a:lstStyle/>
           <a:p>
             <a:pPr>
               <a:spcAft>
-                <a:spcPts val="900"/>
+                <a:spcPts val="800"/>
               </a:spcAft>
             </a:pPr>
             <a:r>
-              <a:rPr sz="2000" b="0">
+              <a:rPr sz="1700" b="0">
                 <a:solidFill>
                   <a:srgbClr val="1C1C1A"/>
                 </a:solidFill>
@@ -16238,11 +16539,11 @@
           <a:p>
             <a:pPr>
               <a:spcAft>
-                <a:spcPts val="900"/>
+                <a:spcPts val="800"/>
               </a:spcAft>
             </a:pPr>
             <a:r>
-              <a:rPr sz="2000" b="0">
+              <a:rPr sz="1700" b="0">
                 <a:solidFill>
                   <a:srgbClr val="1C1C1A"/>
                 </a:solidFill>
@@ -16314,7 +16615,7 @@
           <a:noFill/>
         </p:spPr>
         <p:txBody>
-          <a:bodyPr wrap="square" anchor="t">
+          <a:bodyPr wrap="square" anchor="t" lIns="0" rIns="0" tIns="0" bIns="0">
             <a:spAutoFit/>
           </a:bodyPr>
           <a:lstStyle/>
@@ -16348,7 +16649,7 @@
           <a:noFill/>
         </p:spPr>
         <p:txBody>
-          <a:bodyPr wrap="square" anchor="t">
+          <a:bodyPr wrap="square" anchor="t" lIns="0" rIns="0" tIns="0" bIns="0">
             <a:spAutoFit/>
           </a:bodyPr>
           <a:lstStyle/>
@@ -16498,7 +16799,7 @@
           <a:noFill/>
         </p:spPr>
         <p:txBody>
-          <a:bodyPr wrap="square" anchor="ctr">
+          <a:bodyPr wrap="square" anchor="ctr" lIns="0" rIns="0" tIns="0" bIns="0">
             <a:spAutoFit/>
           </a:bodyPr>
           <a:lstStyle/>
@@ -16576,7 +16877,7 @@
           <a:noFill/>
         </p:spPr>
         <p:txBody>
-          <a:bodyPr wrap="square" anchor="t">
+          <a:bodyPr wrap="square" anchor="t" lIns="0" rIns="0" tIns="0" bIns="0">
             <a:spAutoFit/>
           </a:bodyPr>
           <a:lstStyle/>
@@ -16610,7 +16911,7 @@
           <a:noFill/>
         </p:spPr>
         <p:txBody>
-          <a:bodyPr wrap="square" anchor="t">
+          <a:bodyPr wrap="square" anchor="t" lIns="0" rIns="0" tIns="0" bIns="0">
             <a:spAutoFit/>
           </a:bodyPr>
           <a:lstStyle/>
@@ -16644,7 +16945,7 @@
           <a:noFill/>
         </p:spPr>
         <p:txBody>
-          <a:bodyPr wrap="square" anchor="t">
+          <a:bodyPr wrap="square" anchor="t" lIns="0" rIns="0" tIns="0" bIns="0">
             <a:spAutoFit/>
           </a:bodyPr>
           <a:lstStyle/>
@@ -16678,7 +16979,7 @@
           <a:noFill/>
         </p:spPr>
         <p:txBody>
-          <a:bodyPr wrap="square" anchor="t">
+          <a:bodyPr wrap="square" anchor="t" lIns="0" rIns="0" tIns="0" bIns="0">
             <a:spAutoFit/>
           </a:bodyPr>
           <a:lstStyle/>
@@ -16712,7 +17013,7 @@
           <a:noFill/>
         </p:spPr>
         <p:txBody>
-          <a:bodyPr wrap="square" anchor="t">
+          <a:bodyPr wrap="square" anchor="t" lIns="0" rIns="0" tIns="0" bIns="0">
             <a:spAutoFit/>
           </a:bodyPr>
           <a:lstStyle/>
@@ -16746,7 +17047,7 @@
           <a:noFill/>
         </p:spPr>
         <p:txBody>
-          <a:bodyPr wrap="square" anchor="t">
+          <a:bodyPr wrap="square" anchor="t" lIns="0" rIns="0" tIns="0" bIns="0">
             <a:spAutoFit/>
           </a:bodyPr>
           <a:lstStyle/>
@@ -16780,7 +17081,7 @@
           <a:noFill/>
         </p:spPr>
         <p:txBody>
-          <a:bodyPr wrap="square" anchor="t">
+          <a:bodyPr wrap="square" anchor="t" lIns="0" rIns="0" tIns="0" bIns="0">
             <a:spAutoFit/>
           </a:bodyPr>
           <a:lstStyle/>
@@ -16814,7 +17115,7 @@
           <a:noFill/>
         </p:spPr>
         <p:txBody>
-          <a:bodyPr wrap="square" anchor="t">
+          <a:bodyPr wrap="square" anchor="t" lIns="0" rIns="0" tIns="0" bIns="0">
             <a:spAutoFit/>
           </a:bodyPr>
           <a:lstStyle/>
@@ -16892,7 +17193,7 @@
           <a:noFill/>
         </p:spPr>
         <p:txBody>
-          <a:bodyPr wrap="square" anchor="t">
+          <a:bodyPr wrap="square" anchor="t" lIns="0" rIns="0" tIns="0" bIns="0">
             <a:spAutoFit/>
           </a:bodyPr>
           <a:lstStyle/>
@@ -16926,7 +17227,7 @@
           <a:noFill/>
         </p:spPr>
         <p:txBody>
-          <a:bodyPr wrap="square" anchor="t">
+          <a:bodyPr wrap="square" anchor="t" lIns="0" rIns="0" tIns="0" bIns="0">
             <a:spAutoFit/>
           </a:bodyPr>
           <a:lstStyle/>
@@ -17076,7 +17377,7 @@
           <a:noFill/>
         </p:spPr>
         <p:txBody>
-          <a:bodyPr wrap="square" anchor="ctr">
+          <a:bodyPr wrap="square" anchor="ctr" lIns="0" rIns="0" tIns="0" bIns="0">
             <a:spAutoFit/>
           </a:bodyPr>
           <a:lstStyle/>
@@ -17154,7 +17455,7 @@
           <a:noFill/>
         </p:spPr>
         <p:txBody>
-          <a:bodyPr wrap="square" anchor="t">
+          <a:bodyPr wrap="square" anchor="t" lIns="0" rIns="0" tIns="0" bIns="0">
             <a:spAutoFit/>
           </a:bodyPr>
           <a:lstStyle/>
@@ -17253,7 +17554,7 @@
           <a:noFill/>
         </p:spPr>
         <p:txBody>
-          <a:bodyPr wrap="square" anchor="t">
+          <a:bodyPr wrap="square" anchor="t" lIns="0" rIns="0" tIns="0" bIns="0">
             <a:spAutoFit/>
           </a:bodyPr>
           <a:lstStyle/>
@@ -17287,7 +17588,7 @@
           <a:noFill/>
         </p:spPr>
         <p:txBody>
-          <a:bodyPr wrap="square" anchor="t">
+          <a:bodyPr wrap="square" anchor="t" lIns="0" rIns="0" tIns="0" bIns="0">
             <a:spAutoFit/>
           </a:bodyPr>
           <a:lstStyle/>
@@ -17437,7 +17738,7 @@
           <a:noFill/>
         </p:spPr>
         <p:txBody>
-          <a:bodyPr wrap="square" anchor="ctr">
+          <a:bodyPr wrap="square" anchor="ctr" lIns="0" rIns="0" tIns="0" bIns="0">
             <a:spAutoFit/>
           </a:bodyPr>
           <a:lstStyle/>
@@ -17506,8 +17807,8 @@
         </p:nvSpPr>
         <p:spPr>
           <a:xfrm>
-            <a:off x="685800" y="2802128"/>
-            <a:ext cx="10820095" cy="1347216"/>
+            <a:off x="685800" y="2770632"/>
+            <a:ext cx="10820095" cy="1410208"/>
           </a:xfrm>
           <a:prstGeom prst="rect">
             <a:avLst/>
@@ -17550,8 +17851,8 @@
         </p:nvSpPr>
         <p:spPr>
           <a:xfrm>
-            <a:off x="685800" y="2802128"/>
-            <a:ext cx="50292" cy="1347216"/>
+            <a:off x="685800" y="2770632"/>
+            <a:ext cx="50292" cy="1410208"/>
           </a:xfrm>
           <a:prstGeom prst="rect">
             <a:avLst/>
@@ -17594,8 +17895,8 @@
         </p:nvSpPr>
         <p:spPr>
           <a:xfrm>
-            <a:off x="923544" y="2902712"/>
-            <a:ext cx="10417759" cy="1164336"/>
+            <a:off x="923544" y="2871216"/>
+            <a:ext cx="10417759" cy="1227328"/>
           </a:xfrm>
           <a:prstGeom prst="rect">
             <a:avLst/>
@@ -17603,7 +17904,7 @@
           <a:noFill/>
         </p:spPr>
         <p:txBody>
-          <a:bodyPr wrap="square" anchor="t">
+          <a:bodyPr wrap="square" anchor="t" lIns="0" rIns="0" tIns="0" bIns="0">
             <a:spAutoFit/>
           </a:bodyPr>
           <a:lstStyle/>
@@ -17681,7 +17982,7 @@
         </p:nvSpPr>
         <p:spPr>
           <a:xfrm>
-            <a:off x="685800" y="4313936"/>
+            <a:off x="685800" y="4345432"/>
             <a:ext cx="10820095" cy="564896"/>
           </a:xfrm>
           <a:prstGeom prst="rect">
@@ -17690,7 +17991,7 @@
           <a:noFill/>
         </p:spPr>
         <p:txBody>
-          <a:bodyPr wrap="square" anchor="t">
+          <a:bodyPr wrap="square" anchor="t" lIns="0" rIns="0" tIns="0" bIns="0">
             <a:spAutoFit/>
           </a:bodyPr>
           <a:lstStyle/>
@@ -17773,7 +18074,7 @@
           <a:noFill/>
         </p:spPr>
         <p:txBody>
-          <a:bodyPr wrap="square" anchor="t">
+          <a:bodyPr wrap="square" anchor="t" lIns="0" rIns="0" tIns="0" bIns="0">
             <a:spAutoFit/>
           </a:bodyPr>
           <a:lstStyle/>
@@ -17807,7 +18108,7 @@
           <a:noFill/>
         </p:spPr>
         <p:txBody>
-          <a:bodyPr wrap="square" anchor="t">
+          <a:bodyPr wrap="square" anchor="t" lIns="0" rIns="0" tIns="0" bIns="0">
             <a:spAutoFit/>
           </a:bodyPr>
           <a:lstStyle/>
@@ -17904,7 +18205,7 @@
           <a:noFill/>
         </p:spPr>
         <p:txBody>
-          <a:bodyPr wrap="square" anchor="ctr">
+          <a:bodyPr wrap="square" anchor="ctr" lIns="0" rIns="0" tIns="0" bIns="0">
             <a:spAutoFit/>
           </a:bodyPr>
           <a:lstStyle/>
@@ -18248,7 +18549,7 @@
           <a:noFill/>
         </p:spPr>
         <p:txBody>
-          <a:bodyPr wrap="square" anchor="t">
+          <a:bodyPr wrap="square" anchor="t" lIns="0" rIns="0" tIns="0" bIns="0">
             <a:spAutoFit/>
           </a:bodyPr>
           <a:lstStyle/>
@@ -18282,7 +18583,7 @@
           <a:noFill/>
         </p:spPr>
         <p:txBody>
-          <a:bodyPr wrap="square" anchor="t">
+          <a:bodyPr wrap="square" anchor="t" lIns="0" rIns="0" tIns="0" bIns="0">
             <a:spAutoFit/>
           </a:bodyPr>
           <a:lstStyle/>
@@ -18432,7 +18733,7 @@
           <a:noFill/>
         </p:spPr>
         <p:txBody>
-          <a:bodyPr wrap="square" anchor="ctr">
+          <a:bodyPr wrap="square" anchor="ctr" lIns="0" rIns="0" tIns="0" bIns="0">
             <a:spAutoFit/>
           </a:bodyPr>
           <a:lstStyle/>
@@ -18493,9 +18794,64 @@
           </a:p>
         </p:txBody>
       </p:sp>
+      <p:sp>
+        <p:nvSpPr>
+          <p:cNvPr id="6" name="TextBox 5"/>
+          <p:cNvSpPr txBox="1"/>
+          <p:nvPr/>
+        </p:nvSpPr>
+        <p:spPr>
+          <a:xfrm>
+            <a:off x="685800" y="1627632"/>
+            <a:ext cx="10820095" cy="1710944"/>
+          </a:xfrm>
+          <a:prstGeom prst="rect">
+            <a:avLst/>
+          </a:prstGeom>
+          <a:noFill/>
+        </p:spPr>
+        <p:txBody>
+          <a:bodyPr wrap="square" anchor="t" lIns="0" rIns="0" tIns="0" bIns="0">
+            <a:spAutoFit/>
+          </a:bodyPr>
+          <a:lstStyle/>
+          <a:p>
+            <a:pPr>
+              <a:spcAft>
+                <a:spcPts val="900"/>
+              </a:spcAft>
+            </a:pPr>
+            <a:r>
+              <a:rPr sz="2000" b="0">
+                <a:solidFill>
+                  <a:srgbClr val="1C1C1A"/>
+                </a:solidFill>
+                <a:latin typeface="Calibri"/>
+              </a:rPr>
+              <a:t>A Codespace is a computer that GitHub runs for you and shows you inside a browser tab, with VS Code, Python and this repository already on it.</a:t>
+            </a:r>
+          </a:p>
+          <a:p>
+            <a:pPr>
+              <a:spcAft>
+                <a:spcPts val="900"/>
+              </a:spcAft>
+            </a:pPr>
+            <a:r>
+              <a:rPr sz="2000" b="0">
+                <a:solidFill>
+                  <a:srgbClr val="1C1C1A"/>
+                </a:solidFill>
+                <a:latin typeface="Calibri"/>
+              </a:rPr>
+              <a:t>Nothing is installed on your laptop and nothing needs to be. The Codespace you open today is the environment for the whole programme.</a:t>
+            </a:r>
+          </a:p>
+        </p:txBody>
+      </p:sp>
       <p:pic>
         <p:nvPicPr>
-          <p:cNvPr id="6" name="Picture 5" descr="8003b6c1790a187d.png"/>
+          <p:cNvPr id="7" name="Picture 6" descr="4c957173599c672c.png"/>
           <p:cNvPicPr>
             <a:picLocks noChangeAspect="1"/>
           </p:cNvPicPr>
@@ -18509,48 +18865,14 @@
         </p:blipFill>
         <p:spPr>
           <a:xfrm>
-            <a:off x="3190339" y="1627632"/>
-            <a:ext cx="5811016" cy="2769615"/>
+            <a:off x="3601757" y="3675887"/>
+            <a:ext cx="4988180" cy="2377440"/>
           </a:xfrm>
           <a:prstGeom prst="rect">
             <a:avLst/>
           </a:prstGeom>
         </p:spPr>
       </p:pic>
-      <p:sp>
-        <p:nvSpPr>
-          <p:cNvPr id="7" name="TextBox 6"/>
-          <p:cNvSpPr txBox="1"/>
-          <p:nvPr/>
-        </p:nvSpPr>
-        <p:spPr>
-          <a:xfrm>
-            <a:off x="685800" y="4506976"/>
-            <a:ext cx="10820095" cy="1546352"/>
-          </a:xfrm>
-          <a:prstGeom prst="rect">
-            <a:avLst/>
-          </a:prstGeom>
-          <a:noFill/>
-        </p:spPr>
-        <p:txBody>
-          <a:bodyPr wrap="square" anchor="t">
-            <a:spAutoFit/>
-          </a:bodyPr>
-          <a:lstStyle/>
-          <a:p>
-            <a:r>
-              <a:rPr sz="2000" b="0">
-                <a:solidFill>
-                  <a:srgbClr val="1C1C1A"/>
-                </a:solidFill>
-                <a:latin typeface="Calibri"/>
-              </a:rPr>
-              <a:t>A Codespace is a computer that GitHub runs for you and shows you inside a browser tab, with VS Code, Python and this repository already on it. Nothing is installed on your laptop and nothing needs to be. The Codespace you open today is the environment for the whole programme.</a:t>
-            </a:r>
-          </a:p>
-        </p:txBody>
-      </p:sp>
       <p:sp>
         <p:nvSpPr>
           <p:cNvPr id="8" name="Rectangle 7"/>
@@ -18612,7 +18934,7 @@
           <a:noFill/>
         </p:spPr>
         <p:txBody>
-          <a:bodyPr wrap="square" anchor="t">
+          <a:bodyPr wrap="square" anchor="t" lIns="0" rIns="0" tIns="0" bIns="0">
             <a:spAutoFit/>
           </a:bodyPr>
           <a:lstStyle/>
@@ -18646,7 +18968,7 @@
           <a:noFill/>
         </p:spPr>
         <p:txBody>
-          <a:bodyPr wrap="square" anchor="t">
+          <a:bodyPr wrap="square" anchor="t" lIns="0" rIns="0" tIns="0" bIns="0">
             <a:spAutoFit/>
           </a:bodyPr>
           <a:lstStyle/>
@@ -18796,7 +19118,7 @@
           <a:noFill/>
         </p:spPr>
         <p:txBody>
-          <a:bodyPr wrap="square" anchor="ctr">
+          <a:bodyPr wrap="square" anchor="ctr" lIns="0" rIns="0" tIns="0" bIns="0">
             <a:spAutoFit/>
           </a:bodyPr>
           <a:lstStyle/>
@@ -18874,7 +19196,7 @@
           <a:noFill/>
         </p:spPr>
         <p:txBody>
-          <a:bodyPr wrap="square" anchor="t">
+          <a:bodyPr wrap="square" anchor="t" lIns="0" rIns="0" tIns="0" bIns="0">
             <a:spAutoFit/>
           </a:bodyPr>
           <a:lstStyle/>
@@ -19021,7 +19343,7 @@
           <a:noFill/>
         </p:spPr>
         <p:txBody>
-          <a:bodyPr wrap="square" anchor="t">
+          <a:bodyPr wrap="square" anchor="t" lIns="0" rIns="0" tIns="0" bIns="0">
             <a:spAutoFit/>
           </a:bodyPr>
           <a:lstStyle/>
@@ -19055,7 +19377,7 @@
           <a:noFill/>
         </p:spPr>
         <p:txBody>
-          <a:bodyPr wrap="square" anchor="t">
+          <a:bodyPr wrap="square" anchor="t" lIns="0" rIns="0" tIns="0" bIns="0">
             <a:spAutoFit/>
           </a:bodyPr>
           <a:lstStyle/>
@@ -19205,7 +19527,7 @@
           <a:noFill/>
         </p:spPr>
         <p:txBody>
-          <a:bodyPr wrap="square" anchor="ctr">
+          <a:bodyPr wrap="square" anchor="ctr" lIns="0" rIns="0" tIns="0" bIns="0">
             <a:spAutoFit/>
           </a:bodyPr>
           <a:lstStyle/>
@@ -19283,7 +19605,7 @@
           <a:noFill/>
         </p:spPr>
         <p:txBody>
-          <a:bodyPr wrap="square" anchor="t">
+          <a:bodyPr wrap="square" anchor="t" lIns="0" rIns="0" tIns="0" bIns="0">
             <a:spAutoFit/>
           </a:bodyPr>
           <a:lstStyle/>
@@ -19382,7 +19704,7 @@
           <a:noFill/>
         </p:spPr>
         <p:txBody>
-          <a:bodyPr wrap="square" anchor="t">
+          <a:bodyPr wrap="square" anchor="t" lIns="0" rIns="0" tIns="0" bIns="0">
             <a:spAutoFit/>
           </a:bodyPr>
           <a:lstStyle/>
@@ -19416,7 +19738,7 @@
           <a:noFill/>
         </p:spPr>
         <p:txBody>
-          <a:bodyPr wrap="square" anchor="t">
+          <a:bodyPr wrap="square" anchor="t" lIns="0" rIns="0" tIns="0" bIns="0">
             <a:spAutoFit/>
           </a:bodyPr>
           <a:lstStyle/>
@@ -19566,7 +19888,7 @@
           <a:noFill/>
         </p:spPr>
         <p:txBody>
-          <a:bodyPr wrap="square" anchor="ctr">
+          <a:bodyPr wrap="square" anchor="ctr" lIns="0" rIns="0" tIns="0" bIns="0">
             <a:spAutoFit/>
           </a:bodyPr>
           <a:lstStyle/>
@@ -19644,7 +19966,7 @@
           <a:noFill/>
         </p:spPr>
         <p:txBody>
-          <a:bodyPr wrap="square" anchor="t">
+          <a:bodyPr wrap="square" anchor="t" lIns="0" rIns="0" tIns="0" bIns="0">
             <a:spAutoFit/>
           </a:bodyPr>
           <a:lstStyle/>
@@ -19678,7 +20000,7 @@
           <a:noFill/>
         </p:spPr>
         <p:txBody>
-          <a:bodyPr wrap="square" anchor="t">
+          <a:bodyPr wrap="square" anchor="t" lIns="0" rIns="0" tIns="0" bIns="0">
             <a:spAutoFit/>
           </a:bodyPr>
           <a:lstStyle/>
@@ -19712,7 +20034,7 @@
           <a:noFill/>
         </p:spPr>
         <p:txBody>
-          <a:bodyPr wrap="square" anchor="t">
+          <a:bodyPr wrap="square" anchor="t" lIns="0" rIns="0" tIns="0" bIns="0">
             <a:spAutoFit/>
           </a:bodyPr>
           <a:lstStyle/>
@@ -19746,7 +20068,7 @@
           <a:noFill/>
         </p:spPr>
         <p:txBody>
-          <a:bodyPr wrap="square" anchor="t">
+          <a:bodyPr wrap="square" anchor="t" lIns="0" rIns="0" tIns="0" bIns="0">
             <a:spAutoFit/>
           </a:bodyPr>
           <a:lstStyle/>
@@ -19780,7 +20102,7 @@
           <a:noFill/>
         </p:spPr>
         <p:txBody>
-          <a:bodyPr wrap="square" anchor="t">
+          <a:bodyPr wrap="square" anchor="t" lIns="0" rIns="0" tIns="0" bIns="0">
             <a:spAutoFit/>
           </a:bodyPr>
           <a:lstStyle/>
@@ -19814,7 +20136,7 @@
           <a:noFill/>
         </p:spPr>
         <p:txBody>
-          <a:bodyPr wrap="square" anchor="t">
+          <a:bodyPr wrap="square" anchor="t" lIns="0" rIns="0" tIns="0" bIns="0">
             <a:spAutoFit/>
           </a:bodyPr>
           <a:lstStyle/>
@@ -19848,7 +20170,7 @@
           <a:noFill/>
         </p:spPr>
         <p:txBody>
-          <a:bodyPr wrap="square" anchor="t">
+          <a:bodyPr wrap="square" anchor="t" lIns="0" rIns="0" tIns="0" bIns="0">
             <a:spAutoFit/>
           </a:bodyPr>
           <a:lstStyle/>
@@ -19882,7 +20204,7 @@
           <a:noFill/>
         </p:spPr>
         <p:txBody>
-          <a:bodyPr wrap="square" anchor="t">
+          <a:bodyPr wrap="square" anchor="t" lIns="0" rIns="0" tIns="0" bIns="0">
             <a:spAutoFit/>
           </a:bodyPr>
           <a:lstStyle/>
@@ -19960,7 +20282,7 @@
           <a:noFill/>
         </p:spPr>
         <p:txBody>
-          <a:bodyPr wrap="square" anchor="t">
+          <a:bodyPr wrap="square" anchor="t" lIns="0" rIns="0" tIns="0" bIns="0">
             <a:spAutoFit/>
           </a:bodyPr>
           <a:lstStyle/>
@@ -19994,7 +20316,7 @@
           <a:noFill/>
         </p:spPr>
         <p:txBody>
-          <a:bodyPr wrap="square" anchor="t">
+          <a:bodyPr wrap="square" anchor="t" lIns="0" rIns="0" tIns="0" bIns="0">
             <a:spAutoFit/>
           </a:bodyPr>
           <a:lstStyle/>

--- a/content/W01/D1/slides/C2_W01_D01_half1_STUDENT.pptx
+++ b/content/W01/D1/slides/C2_W01_D01_half1_STUDENT.pptx
@@ -6343,8 +6343,8 @@
         </p:blipFill>
         <p:spPr>
           <a:xfrm>
-            <a:off x="4491808" y="1627632"/>
-            <a:ext cx="3208077" cy="2769615"/>
+            <a:off x="4370005" y="1517904"/>
+            <a:ext cx="3451684" cy="2979928"/>
           </a:xfrm>
           <a:prstGeom prst="rect">
             <a:avLst/>
@@ -6359,8 +6359,8 @@
         </p:nvSpPr>
         <p:spPr>
           <a:xfrm>
-            <a:off x="685800" y="4506976"/>
-            <a:ext cx="10820095" cy="1546352"/>
+            <a:off x="685800" y="4543552"/>
+            <a:ext cx="10820095" cy="1509775"/>
           </a:xfrm>
           <a:prstGeom prst="rect">
             <a:avLst/>
